--- a/curso/pptx/S09.pptx
+++ b/curso/pptx/S09.pptx
@@ -3892,8 +3892,8 @@
         </p:nvSpPr>
         <p:spPr>
           <a:xfrm>
-            <a:off x="640000" y="420000"/>
-            <a:ext cx="10912000" cy="420000"/>
+            <a:off x="10652000" y="380000"/>
+            <a:ext cx="900000" cy="800000"/>
           </a:xfrm>
           <a:prstGeom prst="rect">
             <a:avLst/>
@@ -3908,17 +3908,17 @@
           <a:p>
             <a:pPr>
               <a:spcAft>
-                <a:spcPts val="810"/>
+                <a:spcPts val="1980"/>
               </a:spcAft>
             </a:pPr>
             <a:r>
-              <a:rPr sz="1800" b="1">
+              <a:rPr sz="4400" b="0">
                 <a:solidFill>
                   <a:srgbClr val="1F2A44"/>
                 </a:solidFill>
                 <a:latin typeface="Nunito Sans"/>
               </a:rPr>
-              <a:t>🦉 Aula de Filosofía</a:t>
+              <a:t>🙃</a:t>
             </a:r>
           </a:p>
         </p:txBody>

--- a/curso/pptx/S09.pptx
+++ b/curso/pptx/S09.pptx
@@ -473,426 +473,6 @@
     </a:lvl9pPr>
   </p:notesStyle>
 </p:notesMaster>
-</file>
-
-<file path=ppt/notesSlides/notesSlide1.xml><?xml version="1.0" encoding="utf-8"?>
-<p:notes xmlns:a="http://schemas.openxmlformats.org/drawingml/2006/main" xmlns:p="http://schemas.openxmlformats.org/presentationml/2006/main" xmlns:r="http://schemas.openxmlformats.org/officeDocument/2006/relationships">
-  <p:cSld>
-    <p:spTree>
-      <p:nvGrpSpPr>
-        <p:cNvPr id="1" name=""/>
-        <p:cNvGrpSpPr/>
-        <p:nvPr/>
-      </p:nvGrpSpPr>
-      <p:grpSpPr>
-        <a:xfrm>
-          <a:off x="0" y="0"/>
-          <a:ext cx="0" cy="0"/>
-          <a:chOff x="0" y="0"/>
-          <a:chExt cx="0" cy="0"/>
-        </a:xfrm>
-      </p:grpSpPr>
-      <p:sp>
-        <p:nvSpPr>
-          <p:cNvPr id="2" name="Slide Image Placeholder 1"/>
-          <p:cNvSpPr>
-            <a:spLocks noGrp="1"/>
-          </p:cNvSpPr>
-          <p:nvPr>
-            <p:ph type="sldImg" idx="2"/>
-          </p:nvPr>
-        </p:nvSpPr>
-        <p:spPr/>
-      </p:sp>
-      <p:sp>
-        <p:nvSpPr>
-          <p:cNvPr id="3" name="Notes Placeholder 2"/>
-          <p:cNvSpPr>
-            <a:spLocks noGrp="1"/>
-          </p:cNvSpPr>
-          <p:nvPr>
-            <p:ph type="body" idx="3" sz="quarter"/>
-          </p:nvPr>
-        </p:nvSpPr>
-        <p:spPr/>
-        <p:txBody>
-          <a:bodyPr/>
-          <a:lstStyle/>
-          <a:p>
-            <a:r>
-              <a:t>3 minutos. Sin apuntes. Es para recordar, no cuenta para nota.</a:t>
-            </a:r>
-          </a:p>
-        </p:txBody>
-      </p:sp>
-      <p:sp>
-        <p:nvSpPr>
-          <p:cNvPr id="4" name="Slide Number Placeholder 3"/>
-          <p:cNvSpPr>
-            <a:spLocks noGrp="1"/>
-          </p:cNvSpPr>
-          <p:nvPr>
-            <p:ph type="sldNum" idx="5" sz="quarter"/>
-          </p:nvPr>
-        </p:nvSpPr>
-        <p:spPr/>
-      </p:sp>
-    </p:spTree>
-  </p:cSld>
-  <p:clrMapOvr>
-    <a:masterClrMapping/>
-  </p:clrMapOvr>
-</p:notes>
-</file>
-
-<file path=ppt/notesSlides/notesSlide2.xml><?xml version="1.0" encoding="utf-8"?>
-<p:notes xmlns:a="http://schemas.openxmlformats.org/drawingml/2006/main" xmlns:p="http://schemas.openxmlformats.org/presentationml/2006/main" xmlns:r="http://schemas.openxmlformats.org/officeDocument/2006/relationships">
-  <p:cSld>
-    <p:spTree>
-      <p:nvGrpSpPr>
-        <p:cNvPr id="1" name=""/>
-        <p:cNvGrpSpPr/>
-        <p:nvPr/>
-      </p:nvGrpSpPr>
-      <p:grpSpPr>
-        <a:xfrm>
-          <a:off x="0" y="0"/>
-          <a:ext cx="0" cy="0"/>
-          <a:chOff x="0" y="0"/>
-          <a:chExt cx="0" cy="0"/>
-        </a:xfrm>
-      </p:grpSpPr>
-      <p:sp>
-        <p:nvSpPr>
-          <p:cNvPr id="2" name="Slide Image Placeholder 1"/>
-          <p:cNvSpPr>
-            <a:spLocks noGrp="1"/>
-          </p:cNvSpPr>
-          <p:nvPr>
-            <p:ph type="sldImg" idx="2"/>
-          </p:nvPr>
-        </p:nvSpPr>
-        <p:spPr/>
-      </p:sp>
-      <p:sp>
-        <p:nvSpPr>
-          <p:cNvPr id="3" name="Notes Placeholder 2"/>
-          <p:cNvSpPr>
-            <a:spLocks noGrp="1"/>
-          </p:cNvSpPr>
-          <p:nvPr>
-            <p:ph type="body" idx="3" sz="quarter"/>
-          </p:nvPr>
-        </p:nvSpPr>
-        <p:spPr/>
-        <p:txBody>
-          <a:bodyPr/>
-          <a:lstStyle/>
-          <a:p>
-            <a:r>
-              <a:t>3 minutos. Sin apuntes. Es para recordar, no cuenta para nota.</a:t>
-            </a:r>
-          </a:p>
-        </p:txBody>
-      </p:sp>
-      <p:sp>
-        <p:nvSpPr>
-          <p:cNvPr id="4" name="Slide Number Placeholder 3"/>
-          <p:cNvSpPr>
-            <a:spLocks noGrp="1"/>
-          </p:cNvSpPr>
-          <p:nvPr>
-            <p:ph type="sldNum" idx="5" sz="quarter"/>
-          </p:nvPr>
-        </p:nvSpPr>
-        <p:spPr/>
-      </p:sp>
-    </p:spTree>
-  </p:cSld>
-  <p:clrMapOvr>
-    <a:masterClrMapping/>
-  </p:clrMapOvr>
-</p:notes>
-</file>
-
-<file path=ppt/notesSlides/notesSlide3.xml><?xml version="1.0" encoding="utf-8"?>
-<p:notes xmlns:a="http://schemas.openxmlformats.org/drawingml/2006/main" xmlns:p="http://schemas.openxmlformats.org/presentationml/2006/main" xmlns:r="http://schemas.openxmlformats.org/officeDocument/2006/relationships">
-  <p:cSld>
-    <p:spTree>
-      <p:nvGrpSpPr>
-        <p:cNvPr id="1" name=""/>
-        <p:cNvGrpSpPr/>
-        <p:nvPr/>
-      </p:nvGrpSpPr>
-      <p:grpSpPr>
-        <a:xfrm>
-          <a:off x="0" y="0"/>
-          <a:ext cx="0" cy="0"/>
-          <a:chOff x="0" y="0"/>
-          <a:chExt cx="0" cy="0"/>
-        </a:xfrm>
-      </p:grpSpPr>
-      <p:sp>
-        <p:nvSpPr>
-          <p:cNvPr id="2" name="Slide Image Placeholder 1"/>
-          <p:cNvSpPr>
-            <a:spLocks noGrp="1"/>
-          </p:cNvSpPr>
-          <p:nvPr>
-            <p:ph type="sldImg" idx="2"/>
-          </p:nvPr>
-        </p:nvSpPr>
-        <p:spPr/>
-      </p:sp>
-      <p:sp>
-        <p:nvSpPr>
-          <p:cNvPr id="3" name="Notes Placeholder 2"/>
-          <p:cNvSpPr>
-            <a:spLocks noGrp="1"/>
-          </p:cNvSpPr>
-          <p:nvPr>
-            <p:ph type="body" idx="3" sz="quarter"/>
-          </p:nvPr>
-        </p:nvSpPr>
-        <p:spPr/>
-        <p:txBody>
-          <a:bodyPr/>
-          <a:lstStyle/>
-          <a:p>
-            <a:r>
-              <a:t>Nadie tiene que contestar: solo pensarlo.</a:t>
-            </a:r>
-          </a:p>
-        </p:txBody>
-      </p:sp>
-      <p:sp>
-        <p:nvSpPr>
-          <p:cNvPr id="4" name="Slide Number Placeholder 3"/>
-          <p:cNvSpPr>
-            <a:spLocks noGrp="1"/>
-          </p:cNvSpPr>
-          <p:nvPr>
-            <p:ph type="sldNum" idx="5" sz="quarter"/>
-          </p:nvPr>
-        </p:nvSpPr>
-        <p:spPr/>
-      </p:sp>
-    </p:spTree>
-  </p:cSld>
-  <p:clrMapOvr>
-    <a:masterClrMapping/>
-  </p:clrMapOvr>
-</p:notes>
-</file>
-
-<file path=ppt/notesSlides/notesSlide4.xml><?xml version="1.0" encoding="utf-8"?>
-<p:notes xmlns:a="http://schemas.openxmlformats.org/drawingml/2006/main" xmlns:p="http://schemas.openxmlformats.org/presentationml/2006/main" xmlns:r="http://schemas.openxmlformats.org/officeDocument/2006/relationships">
-  <p:cSld>
-    <p:spTree>
-      <p:nvGrpSpPr>
-        <p:cNvPr id="1" name=""/>
-        <p:cNvGrpSpPr/>
-        <p:nvPr/>
-      </p:nvGrpSpPr>
-      <p:grpSpPr>
-        <a:xfrm>
-          <a:off x="0" y="0"/>
-          <a:ext cx="0" cy="0"/>
-          <a:chOff x="0" y="0"/>
-          <a:chExt cx="0" cy="0"/>
-        </a:xfrm>
-      </p:grpSpPr>
-      <p:sp>
-        <p:nvSpPr>
-          <p:cNvPr id="2" name="Slide Image Placeholder 1"/>
-          <p:cNvSpPr>
-            <a:spLocks noGrp="1"/>
-          </p:cNvSpPr>
-          <p:nvPr>
-            <p:ph type="sldImg" idx="2"/>
-          </p:nvPr>
-        </p:nvSpPr>
-        <p:spPr/>
-      </p:sp>
-      <p:sp>
-        <p:nvSpPr>
-          <p:cNvPr id="3" name="Notes Placeholder 2"/>
-          <p:cNvSpPr>
-            <a:spLocks noGrp="1"/>
-          </p:cNvSpPr>
-          <p:nvPr>
-            <p:ph type="body" idx="3" sz="quarter"/>
-          </p:nvPr>
-        </p:nvSpPr>
-        <p:spPr/>
-        <p:txBody>
-          <a:bodyPr/>
-          <a:lstStyle/>
-          <a:p>
-            <a:r>
-              <a:t>Dejar unos segundos para que piensen la respuesta fácil antes de enseñar los pasos.</a:t>
-            </a:r>
-          </a:p>
-        </p:txBody>
-      </p:sp>
-      <p:sp>
-        <p:nvSpPr>
-          <p:cNvPr id="4" name="Slide Number Placeholder 3"/>
-          <p:cNvSpPr>
-            <a:spLocks noGrp="1"/>
-          </p:cNvSpPr>
-          <p:nvPr>
-            <p:ph type="sldNum" idx="5" sz="quarter"/>
-          </p:nvPr>
-        </p:nvSpPr>
-        <p:spPr/>
-      </p:sp>
-    </p:spTree>
-  </p:cSld>
-  <p:clrMapOvr>
-    <a:masterClrMapping/>
-  </p:clrMapOvr>
-</p:notes>
-</file>
-
-<file path=ppt/notesSlides/notesSlide5.xml><?xml version="1.0" encoding="utf-8"?>
-<p:notes xmlns:a="http://schemas.openxmlformats.org/drawingml/2006/main" xmlns:p="http://schemas.openxmlformats.org/presentationml/2006/main" xmlns:r="http://schemas.openxmlformats.org/officeDocument/2006/relationships">
-  <p:cSld>
-    <p:spTree>
-      <p:nvGrpSpPr>
-        <p:cNvPr id="1" name=""/>
-        <p:cNvGrpSpPr/>
-        <p:nvPr/>
-      </p:nvGrpSpPr>
-      <p:grpSpPr>
-        <a:xfrm>
-          <a:off x="0" y="0"/>
-          <a:ext cx="0" cy="0"/>
-          <a:chOff x="0" y="0"/>
-          <a:chExt cx="0" cy="0"/>
-        </a:xfrm>
-      </p:grpSpPr>
-      <p:sp>
-        <p:nvSpPr>
-          <p:cNvPr id="2" name="Slide Image Placeholder 1"/>
-          <p:cNvSpPr>
-            <a:spLocks noGrp="1"/>
-          </p:cNvSpPr>
-          <p:nvPr>
-            <p:ph type="sldImg" idx="2"/>
-          </p:nvPr>
-        </p:nvSpPr>
-        <p:spPr/>
-      </p:sp>
-      <p:sp>
-        <p:nvSpPr>
-          <p:cNvPr id="3" name="Notes Placeholder 2"/>
-          <p:cNvSpPr>
-            <a:spLocks noGrp="1"/>
-          </p:cNvSpPr>
-          <p:nvPr>
-            <p:ph type="body" idx="3" sz="quarter"/>
-          </p:nvPr>
-        </p:nvSpPr>
-        <p:spPr/>
-        <p:txBody>
-          <a:bodyPr/>
-          <a:lstStyle/>
-          <a:p>
-            <a:r>
-              <a:t>Dejar 2 minutos para que lo escriban. La diapositiva siguiente muestra el resumen.</a:t>
-            </a:r>
-          </a:p>
-        </p:txBody>
-      </p:sp>
-      <p:sp>
-        <p:nvSpPr>
-          <p:cNvPr id="4" name="Slide Number Placeholder 3"/>
-          <p:cNvSpPr>
-            <a:spLocks noGrp="1"/>
-          </p:cNvSpPr>
-          <p:nvPr>
-            <p:ph type="sldNum" idx="5" sz="quarter"/>
-          </p:nvPr>
-        </p:nvSpPr>
-        <p:spPr/>
-      </p:sp>
-    </p:spTree>
-  </p:cSld>
-  <p:clrMapOvr>
-    <a:masterClrMapping/>
-  </p:clrMapOvr>
-</p:notes>
-</file>
-
-<file path=ppt/notesSlides/notesSlide6.xml><?xml version="1.0" encoding="utf-8"?>
-<p:notes xmlns:a="http://schemas.openxmlformats.org/drawingml/2006/main" xmlns:p="http://schemas.openxmlformats.org/presentationml/2006/main" xmlns:r="http://schemas.openxmlformats.org/officeDocument/2006/relationships">
-  <p:cSld>
-    <p:spTree>
-      <p:nvGrpSpPr>
-        <p:cNvPr id="1" name=""/>
-        <p:cNvGrpSpPr/>
-        <p:nvPr/>
-      </p:nvGrpSpPr>
-      <p:grpSpPr>
-        <a:xfrm>
-          <a:off x="0" y="0"/>
-          <a:ext cx="0" cy="0"/>
-          <a:chOff x="0" y="0"/>
-          <a:chExt cx="0" cy="0"/>
-        </a:xfrm>
-      </p:grpSpPr>
-      <p:sp>
-        <p:nvSpPr>
-          <p:cNvPr id="2" name="Slide Image Placeholder 1"/>
-          <p:cNvSpPr>
-            <a:spLocks noGrp="1"/>
-          </p:cNvSpPr>
-          <p:nvPr>
-            <p:ph type="sldImg" idx="2"/>
-          </p:nvPr>
-        </p:nvSpPr>
-        <p:spPr/>
-      </p:sp>
-      <p:sp>
-        <p:nvSpPr>
-          <p:cNvPr id="3" name="Notes Placeholder 2"/>
-          <p:cNvSpPr>
-            <a:spLocks noGrp="1"/>
-          </p:cNvSpPr>
-          <p:nvPr>
-            <p:ph type="body" idx="3" sz="quarter"/>
-          </p:nvPr>
-        </p:nvSpPr>
-        <p:spPr/>
-        <p:txBody>
-          <a:bodyPr/>
-          <a:lstStyle/>
-          <a:p>
-            <a:r>
-              <a:t>Buscar: «Monty Python clínica de las discusiones subtitulado» · «Monty Python argument clinic español»</a:t>
-            </a:r>
-          </a:p>
-        </p:txBody>
-      </p:sp>
-      <p:sp>
-        <p:nvSpPr>
-          <p:cNvPr id="4" name="Slide Number Placeholder 3"/>
-          <p:cNvSpPr>
-            <a:spLocks noGrp="1"/>
-          </p:cNvSpPr>
-          <p:nvPr>
-            <p:ph type="sldNum" idx="5" sz="quarter"/>
-          </p:nvPr>
-        </p:nvSpPr>
-        <p:spPr/>
-      </p:sp>
-    </p:spTree>
-  </p:cSld>
-  <p:clrMapOvr>
-    <a:masterClrMapping/>
-  </p:clrMapOvr>
-</p:notes>
 </file>
 
 <file path=ppt/slideLayouts/slideLayout1.xml><?xml version="1.0" encoding="utf-8"?>

--- a/curso/pptx/S09.pptx
+++ b/curso/pptx/S09.pptx
@@ -4559,7 +4559,7 @@
                 </a:solidFill>
                 <a:latin typeface="Nunito Sans"/>
               </a:rPr>
-              <a:t>«Iker debería ser nuestro portero: es el más alto de la clase.»</a:t>
+              <a:t>«Un chico debería ser nuestro portero: es el más alto de la clase.»</a:t>
             </a:r>
           </a:p>
         </p:txBody>
@@ -4607,7 +4607,7 @@
                 </a:solidFill>
                 <a:latin typeface="Nunito Sans"/>
               </a:rPr>
-              <a:t>Como con Youssef y el delegado: la altura no viene a cuento, ¿verdad?</a:t>
+              <a:t>Como con el delegado: la altura no viene a cuento, ¿verdad?</a:t>
             </a:r>
           </a:p>
           <a:p>
@@ -4632,7 +4632,7 @@
                 </a:solidFill>
                 <a:latin typeface="Nunito Sans"/>
               </a:rPr>
-              <a:t>Parece igual que lo de Youssef: otra vez la altura.</a:t>
+              <a:t>Parece igual que lo del delegado: otra vez la altura.</a:t>
             </a:r>
           </a:p>
           <a:p>
@@ -5046,7 +5046,7 @@
                           </a:solidFill>
                           <a:latin typeface="Nunito Sans"/>
                         </a:rPr>
-                        <a:t>«Hay que respetar a los profes porque hay que respetarlos»</a:t>
+                        <a:t>«Esta serie es la mejor porque es la mejor»</a:t>
                       </a:r>
                     </a:p>
                   </a:txBody>
@@ -7870,7 +7870,7 @@
                 </a:solidFill>
                 <a:latin typeface="Nunito Sans"/>
               </a:rPr>
-              <a:t>«Youssef debe ser delegado porque es el más alto»</a:t>
+              <a:t>«Un chico debe ser delegado porque es el más alto»</a:t>
             </a:r>
           </a:p>
           <a:p>

--- a/curso/pptx/S09.pptx
+++ b/curso/pptx/S09.pptx
@@ -22,8 +22,6 @@
     <p:sldId id="270" r:id="rId22"/>
     <p:sldId id="271" r:id="rId23"/>
     <p:sldId id="272" r:id="rId24"/>
-    <p:sldId id="273" r:id="rId25"/>
-    <p:sldId id="274" r:id="rId26"/>
   </p:sldIdLst>
   <p:sldSz cx="12192000" cy="6858000" type="screen4x3"/>
   <p:notesSz cx="6858000" cy="9144000"/>
@@ -3537,7 +3535,7 @@
                 </a:solidFill>
                 <a:latin typeface="Nunito Sans"/>
               </a:rPr>
-              <a:t>PENSAMIENTO CRÍTICO · SESIÓN 9 · UNIDAD 2 · ARGUMENTAR</a:t>
+              <a:t>PENSAMIENTO CRÍTICO · SESIÓN 9 · UNIDAD 2 · AUTORIDAD E INFLUENCIA</a:t>
             </a:r>
           </a:p>
         </p:txBody>
@@ -3576,7 +3574,7 @@
                 </a:solidFill>
                 <a:latin typeface="Fredoka"/>
               </a:rPr>
-              <a:t>Buenas razones</a:t>
+              <a:t>Todo el mundo lo hace</a:t>
             </a:r>
           </a:p>
         </p:txBody>
@@ -3615,7 +3613,7 @@
                 </a:solidFill>
                 <a:latin typeface="Nunito Sans"/>
               </a:rPr>
-              <a:t>Una buena razón pasa tres preguntas: ¿es verdad?, ¿viene a cuento?, ¿es suficiente? Si falla una, no sirve para esa conclusión.</a:t>
+              <a:t>La falacia ad populum es creer que algo es verdad o está bien solo porque mucha gente lo cree o lo hace.</a:t>
             </a:r>
           </a:p>
         </p:txBody>
@@ -3634,7 +3632,7 @@
     <p:bg>
       <p:bgPr>
         <a:solidFill>
-          <a:srgbClr val="1F2A44"/>
+          <a:srgbClr val="FBF7EF"/>
         </a:solidFill>
         <a:effectLst/>
       </p:bgPr>
@@ -3654,8 +3652,8 @@
         </p:nvSpPr>
         <p:spPr>
           <a:xfrm>
-            <a:off x="640000" y="2300000"/>
-            <a:ext cx="10912000" cy="500000"/>
+            <a:off x="640000" y="380000"/>
+            <a:ext cx="10912000" cy="420000"/>
           </a:xfrm>
           <a:prstGeom prst="rect">
             <a:avLst/>
@@ -3670,17 +3668,17 @@
           <a:p>
             <a:pPr>
               <a:spcAft>
-                <a:spcPts val="810"/>
-              </a:spcAft>
-            </a:pPr>
-            <a:r>
-              <a:rPr sz="1800" b="1">
-                <a:solidFill>
-                  <a:srgbClr val="F4B183"/>
-                </a:solidFill>
-                <a:latin typeface="Nunito Sans"/>
-              </a:rPr>
-              <a:t>BLOQUE 2</a:t>
+                <a:spcPts val="630"/>
+              </a:spcAft>
+            </a:pPr>
+            <a:r>
+              <a:rPr sz="1400" b="1">
+                <a:solidFill>
+                  <a:srgbClr val="E8793A"/>
+                </a:solidFill>
+                <a:latin typeface="Nunito Sans"/>
+              </a:rPr>
+              <a:t>BLOQUE 2 · CASOS RESUELTOS</a:t>
             </a:r>
           </a:p>
         </p:txBody>
@@ -3693,7 +3691,7 @@
         </p:nvSpPr>
         <p:spPr>
           <a:xfrm>
-            <a:off x="640000" y="2800000"/>
+            <a:off x="640000" y="760000"/>
             <a:ext cx="10912000" cy="800000"/>
           </a:xfrm>
           <a:prstGeom prst="rect">
@@ -3709,17 +3707,222 @@
           <a:p>
             <a:pPr>
               <a:spcAft>
-                <a:spcPts val="2160"/>
-              </a:spcAft>
-            </a:pPr>
-            <a:r>
-              <a:rPr sz="4800" b="1">
-                <a:solidFill>
-                  <a:srgbClr val="FBF7EF"/>
+                <a:spcPts val="1710"/>
+              </a:spcAft>
+            </a:pPr>
+            <a:r>
+              <a:rPr sz="3800" b="1">
+                <a:solidFill>
+                  <a:srgbClr val="1F2A44"/>
                 </a:solidFill>
                 <a:latin typeface="Fredoka"/>
               </a:rPr>
-              <a:t>Casos resueltos</a:t>
+              <a:t>Caso 1 · Los «me gusta»</a:t>
+            </a:r>
+          </a:p>
+        </p:txBody>
+      </p:sp>
+      <p:sp>
+        <p:nvSpPr>
+          <p:cNvPr id="4" name="Rectangle 3"/>
+          <p:cNvSpPr/>
+          <p:nvPr/>
+        </p:nvSpPr>
+        <p:spPr>
+          <a:xfrm>
+            <a:off x="640000" y="1600000"/>
+            <a:ext cx="10912000" cy="1100000"/>
+          </a:xfrm>
+          <a:prstGeom prst="rect">
+            <a:avLst/>
+          </a:prstGeom>
+          <a:solidFill>
+            <a:srgbClr val="FFFFFF"/>
+          </a:solidFill>
+          <a:ln>
+            <a:noFill/>
+          </a:ln>
+        </p:spPr>
+        <p:style>
+          <a:lnRef idx="1">
+            <a:schemeClr val="accent1"/>
+          </a:lnRef>
+          <a:fillRef idx="3">
+            <a:schemeClr val="accent1"/>
+          </a:fillRef>
+          <a:effectRef idx="2">
+            <a:schemeClr val="accent1"/>
+          </a:effectRef>
+          <a:fontRef idx="minor">
+            <a:schemeClr val="lt1"/>
+          </a:fontRef>
+        </p:style>
+        <p:txBody>
+          <a:bodyPr rtlCol="0" anchor="ctr"/>
+          <a:lstStyle/>
+          <a:p>
+            <a:pPr algn="ctr"/>
+          </a:p>
+        </p:txBody>
+      </p:sp>
+      <p:sp>
+        <p:nvSpPr>
+          <p:cNvPr id="5" name="TextBox 4"/>
+          <p:cNvSpPr txBox="1"/>
+          <p:nvPr/>
+        </p:nvSpPr>
+        <p:spPr>
+          <a:xfrm>
+            <a:off x="840000" y="1650000"/>
+            <a:ext cx="10512000" cy="1000000"/>
+          </a:xfrm>
+          <a:prstGeom prst="rect">
+            <a:avLst/>
+          </a:prstGeom>
+          <a:noFill/>
+        </p:spPr>
+        <p:txBody>
+          <a:bodyPr wrap="square" anchor="ctr">
+            <a:spAutoFit/>
+          </a:bodyPr>
+          <a:lstStyle/>
+          <a:p>
+            <a:pPr>
+              <a:spcAft>
+                <a:spcPts val="1170"/>
+              </a:spcAft>
+            </a:pPr>
+            <a:r>
+              <a:rPr sz="2600" b="1">
+                <a:solidFill>
+                  <a:srgbClr val="1F2A44"/>
+                </a:solidFill>
+                <a:latin typeface="Nunito Sans"/>
+              </a:rPr>
+              <a:t>Un vídeo con diez millones de «me gusta» dice que, si cenas después de las ocho, engordas el doble.</a:t>
+            </a:r>
+          </a:p>
+        </p:txBody>
+      </p:sp>
+      <p:sp>
+        <p:nvSpPr>
+          <p:cNvPr id="6" name="TextBox 5"/>
+          <p:cNvSpPr txBox="1"/>
+          <p:nvPr/>
+        </p:nvSpPr>
+        <p:spPr>
+          <a:xfrm>
+            <a:off x="640000" y="2900000"/>
+            <a:ext cx="10912000" cy="3500000"/>
+          </a:xfrm>
+          <a:prstGeom prst="rect">
+            <a:avLst/>
+          </a:prstGeom>
+          <a:noFill/>
+        </p:spPr>
+        <p:txBody>
+          <a:bodyPr wrap="square">
+            <a:spAutoFit/>
+          </a:bodyPr>
+          <a:lstStyle/>
+          <a:p>
+            <a:pPr>
+              <a:spcAft>
+                <a:spcPts val="1080"/>
+              </a:spcAft>
+            </a:pPr>
+            <a:r>
+              <a:rPr sz="2400" b="1">
+                <a:solidFill>
+                  <a:srgbClr val="E8793A"/>
+                </a:solidFill>
+                <a:latin typeface="Nunito Sans"/>
+              </a:rPr>
+              <a:t>1. </a:t>
+            </a:r>
+            <a:r>
+              <a:rPr sz="2400" b="0">
+                <a:solidFill>
+                  <a:srgbClr val="1F2A44"/>
+                </a:solidFill>
+                <a:latin typeface="Nunito Sans"/>
+              </a:rPr>
+              <a:t>¿Qué razón me dan? Que le gusta a mucha gente.</a:t>
+            </a:r>
+          </a:p>
+          <a:p>
+            <a:pPr>
+              <a:spcAft>
+                <a:spcPts val="1080"/>
+              </a:spcAft>
+            </a:pPr>
+            <a:r>
+              <a:rPr sz="2400" b="1">
+                <a:solidFill>
+                  <a:srgbClr val="E8793A"/>
+                </a:solidFill>
+                <a:latin typeface="Nunito Sans"/>
+              </a:rPr>
+              <a:t>2. </a:t>
+            </a:r>
+            <a:r>
+              <a:rPr sz="2400" b="0">
+                <a:solidFill>
+                  <a:srgbClr val="1F2A44"/>
+                </a:solidFill>
+                <a:latin typeface="Nunito Sans"/>
+              </a:rPr>
+              <a:t>¿Los «me gusta» son pruebas? No: miden si algo gusta, no si es verdad.</a:t>
+            </a:r>
+          </a:p>
+          <a:p>
+            <a:pPr>
+              <a:spcAft>
+                <a:spcPts val="1080"/>
+              </a:spcAft>
+            </a:pPr>
+            <a:r>
+              <a:rPr sz="2400" b="1">
+                <a:solidFill>
+                  <a:srgbClr val="E8793A"/>
+                </a:solidFill>
+                <a:latin typeface="Nunito Sans"/>
+              </a:rPr>
+              <a:t>3. </a:t>
+            </a:r>
+            <a:r>
+              <a:rPr sz="2400" b="0">
+                <a:solidFill>
+                  <a:srgbClr val="1F2A44"/>
+                </a:solidFill>
+                <a:latin typeface="Nunito Sans"/>
+              </a:rPr>
+              <a:t>¿Qué falta? Quién lo dice y cómo lo sabe.</a:t>
+            </a:r>
+          </a:p>
+          <a:p>
+            <a:pPr>
+              <a:spcAft>
+                <a:spcPts val="1080"/>
+              </a:spcAft>
+            </a:pPr>
+            <a:r>
+              <a:rPr sz="2400" b="1">
+                <a:solidFill>
+                  <a:srgbClr val="E8793A"/>
+                </a:solidFill>
+                <a:latin typeface="Nunito Sans"/>
+              </a:rPr>
+              <a:t>4. </a:t>
+            </a:r>
+            <a:r>
+              <a:rPr sz="2400" b="0">
+                <a:solidFill>
+                  <a:srgbClr val="1F2A44"/>
+                </a:solidFill>
+                <a:latin typeface="Nunito Sans"/>
+              </a:rPr>
+              <a:t>Conclusión: ad populum. Diez millones de «me gusta» no hacen que algo sea verdad.</a:t>
             </a:r>
           </a:p>
         </p:txBody>
@@ -3823,7 +4026,7 @@
                 </a:solidFill>
                 <a:latin typeface="Fredoka"/>
               </a:rPr>
-              <a:t>Caso 1 · Las zapatillas</a:t>
+              <a:t>Caso 2 · Las zapatillas</a:t>
             </a:r>
           </a:p>
         </p:txBody>
@@ -3905,7 +4108,7 @@
                 </a:solidFill>
                 <a:latin typeface="Nunito Sans"/>
               </a:rPr>
-              <a:t>«Estas zapatillas son las mejores para correr: las anuncia un futbolista famoso.»</a:t>
+              <a:t>Una chica quiere unas zapatillas de 150 euros: «Las lleva toda la clase».</a:t>
             </a:r>
           </a:p>
         </p:txBody>
@@ -3953,7 +4156,7 @@
                 </a:solidFill>
                 <a:latin typeface="Nunito Sans"/>
               </a:rPr>
-              <a:t>¿Es verdad? Sí: es verdad que las anuncia.</a:t>
+              <a:t>¿Qué me piden creer? Que tiene que comprarlas.</a:t>
             </a:r>
           </a:p>
           <a:p>
@@ -3978,7 +4181,7 @@
                 </a:solidFill>
                 <a:latin typeface="Nunito Sans"/>
               </a:rPr>
-              <a:t>¿Viene a cuento? No: anunciarlas no dice si son buenas para correr. Además, le pagan por hacerlo.</a:t>
+              <a:t>¿Qué razón da? Que las llevan muchos: es prueba social.</a:t>
             </a:r>
           </a:p>
           <a:p>
@@ -4003,7 +4206,7 @@
                 </a:solidFill>
                 <a:latin typeface="Nunito Sans"/>
               </a:rPr>
-              <a:t>Ya ha fallado una: no hace falta seguir.</a:t>
+              <a:t>¿Viene a cuento? Querer ir como los demás se entiende, pero no dice que sean mejores ni que las necesite.</a:t>
             </a:r>
           </a:p>
           <a:p>
@@ -4028,25 +4231,7 @@
                 </a:solidFill>
                 <a:latin typeface="Nunito Sans"/>
               </a:rPr>
-              <a:t>Conclusión: es una </a:t>
-            </a:r>
-            <a:r>
-              <a:rPr sz="2400" b="1">
-                <a:solidFill>
-                  <a:srgbClr val="1F2A44"/>
-                </a:solidFill>
-                <a:latin typeface="Nunito Sans"/>
-              </a:rPr>
-              <a:t>mala razón</a:t>
-            </a:r>
-            <a:r>
-              <a:rPr sz="2400" b="0">
-                <a:solidFill>
-                  <a:srgbClr val="1F2A44"/>
-                </a:solidFill>
-                <a:latin typeface="Nunito Sans"/>
-              </a:rPr>
-              <a:t>, porque no viene a cuento.</a:t>
+              <a:t>Conclusión: razón débil. Mejores preguntas: ¿las necesito?, ¿me gustan a mí?</a:t>
             </a:r>
           </a:p>
         </p:txBody>
@@ -4150,7 +4335,7 @@
                 </a:solidFill>
                 <a:latin typeface="Fredoka"/>
               </a:rPr>
-              <a:t>Caso 2 · Vuelta al principio</a:t>
+              <a:t>Caso 3 · Cuando la mayoría sí es una pista</a:t>
             </a:r>
           </a:p>
         </p:txBody>
@@ -4232,7 +4417,7 @@
                 </a:solidFill>
                 <a:latin typeface="Nunito Sans"/>
               </a:rPr>
-              <a:t>«Convencedme de que hoy no ponga deberes.» «Porque no.» «Porque eres el mejor profe.» «Porque mañana tenemos examen de Matemáticas.»</a:t>
+              <a:t>Un chico busca dónde comer en Aste Nagusia. Un bar tiene 2.000 opiniones y casi todas dicen que se come bien (ejemplo inventado).</a:t>
             </a:r>
           </a:p>
         </p:txBody>
@@ -4280,7 +4465,7 @@
                 </a:solidFill>
                 <a:latin typeface="Nunito Sans"/>
               </a:rPr>
-              <a:t>«Porque no»: no da ninguna razón. Solo repite la conclusión.</a:t>
+              <a:t>¿Es ad populum? No del todo: esas personas han comido allí.</a:t>
             </a:r>
           </a:p>
           <a:p>
@@ -4305,7 +4490,7 @@
                 </a:solidFill>
                 <a:latin typeface="Nunito Sans"/>
               </a:rPr>
-              <a:t>«Porque eres el mejor profe»: es un halago. No viene a cuento con los deberes.</a:t>
+              <a:t>Opinan de algo que conocen, y a menudo cuentan detalles.</a:t>
             </a:r>
           </a:p>
           <a:p>
@@ -4330,7 +4515,7 @@
                 </a:solidFill>
                 <a:latin typeface="Nunito Sans"/>
               </a:rPr>
-              <a:t>«Porque mañana hay examen»: es verdad, viene a cuento y puede bastar para pedir la tarde libre.</a:t>
+              <a:t>Aun así, puede haber opiniones falsas o pagadas.</a:t>
             </a:r>
           </a:p>
           <a:p>
@@ -4355,25 +4540,7 @@
                 </a:solidFill>
                 <a:latin typeface="Nunito Sans"/>
               </a:rPr>
-              <a:t>Conclusión: solo la tercera es una </a:t>
-            </a:r>
-            <a:r>
-              <a:rPr sz="2400" b="1">
-                <a:solidFill>
-                  <a:srgbClr val="1F2A44"/>
-                </a:solidFill>
-                <a:latin typeface="Nunito Sans"/>
-              </a:rPr>
-              <a:t>buena razón</a:t>
-            </a:r>
-            <a:r>
-              <a:rPr sz="2400" b="0">
-                <a:solidFill>
-                  <a:srgbClr val="1F2A44"/>
-                </a:solidFill>
-                <a:latin typeface="Nunito Sans"/>
-              </a:rPr>
-              <a:t>.</a:t>
+              <a:t>Conclusión: es una pista razonable, no una prueba segura.</a:t>
             </a:r>
           </a:p>
         </p:txBody>
@@ -4477,7 +4644,7 @@
                 </a:solidFill>
                 <a:latin typeface="Fredoka"/>
               </a:rPr>
-              <a:t>⚠ ¿La altura no viene a cuento?</a:t>
+              <a:t>⚠ Conducir en Londres</a:t>
             </a:r>
           </a:p>
         </p:txBody>
@@ -4559,7 +4726,7 @@
                 </a:solidFill>
                 <a:latin typeface="Nunito Sans"/>
               </a:rPr>
-              <a:t>«Un chico debería ser nuestro portero: es el más alto de la clase.»</a:t>
+              <a:t>Una chica llega a Londres y pregunta a su prima por qué lado van los coches. La prima: «Por la izquierda: aquí lo hace todo el mundo».</a:t>
             </a:r>
           </a:p>
         </p:txBody>
@@ -4607,7 +4774,7 @@
                 </a:solidFill>
                 <a:latin typeface="Nunito Sans"/>
               </a:rPr>
-              <a:t>Como con el delegado: la altura no viene a cuento, ¿verdad?</a:t>
+              <a:t>«Porque lo hace todo el mundo»… ¿ad populum?</a:t>
             </a:r>
           </a:p>
           <a:p>
@@ -4632,7 +4799,7 @@
                 </a:solidFill>
                 <a:latin typeface="Nunito Sans"/>
               </a:rPr>
-              <a:t>Parece igual que lo del delegado: otra vez la altura.</a:t>
+              <a:t>Tiene la forma: «es así porque todos lo hacen».</a:t>
             </a:r>
           </a:p>
           <a:p>
@@ -4657,7 +4824,7 @@
                 </a:solidFill>
                 <a:latin typeface="Nunito Sans"/>
               </a:rPr>
-              <a:t>Pero la conclusión es otra. Un portero alto llega a más balones: aquí la altura sí importa.</a:t>
+              <a:t>Pero esa chica no pregunta qué es verdad sobre el mundo ni qué está bien. Pregunta cuál es la costumbre.</a:t>
             </a:r>
           </a:p>
           <a:p>
@@ -4682,7 +4849,7 @@
                 </a:solidFill>
                 <a:latin typeface="Nunito Sans"/>
               </a:rPr>
-              <a:t>¿Es suficiente? Sola, no: también cuentan los reflejos y las ganas.</a:t>
+              <a:t>En costumbres y normas (conducir, saludar, hablar), lo que hace todo el mundo es justo lo que hay que saber.</a:t>
             </a:r>
           </a:p>
           <a:p>
@@ -4707,7 +4874,7 @@
                 </a:solidFill>
                 <a:latin typeface="Nunito Sans"/>
               </a:rPr>
-              <a:t>Conclusión: si una razón viene a cuento depende de la conclusión. No la juzgues por su forma.</a:t>
+              <a:t>Conclusión: no es falacia. Lo que hacen todos dice cuál es la costumbre, no qué es verdad ni qué está bien.</a:t>
             </a:r>
           </a:p>
         </p:txBody>
@@ -4726,7 +4893,7 @@
     <p:bg>
       <p:bgPr>
         <a:solidFill>
-          <a:srgbClr val="1F2A44"/>
+          <a:srgbClr val="FBF7EF"/>
         </a:solidFill>
         <a:effectLst/>
       </p:bgPr>
@@ -4746,8 +4913,8 @@
         </p:nvSpPr>
         <p:spPr>
           <a:xfrm>
-            <a:off x="640000" y="2300000"/>
-            <a:ext cx="10912000" cy="500000"/>
+            <a:off x="640000" y="380000"/>
+            <a:ext cx="10912000" cy="420000"/>
           </a:xfrm>
           <a:prstGeom prst="rect">
             <a:avLst/>
@@ -4762,17 +4929,17 @@
           <a:p>
             <a:pPr>
               <a:spcAft>
-                <a:spcPts val="810"/>
-              </a:spcAft>
-            </a:pPr>
-            <a:r>
-              <a:rPr sz="1800" b="1">
-                <a:solidFill>
-                  <a:srgbClr val="F4B183"/>
-                </a:solidFill>
-                <a:latin typeface="Nunito Sans"/>
-              </a:rPr>
-              <a:t>BLOQUE 3</a:t>
+                <a:spcPts val="630"/>
+              </a:spcAft>
+            </a:pPr>
+            <a:r>
+              <a:rPr sz="1400" b="1">
+                <a:solidFill>
+                  <a:srgbClr val="E8793A"/>
+                </a:solidFill>
+                <a:latin typeface="Nunito Sans"/>
+              </a:rPr>
+              <a:t>LO DE HOY EN TRES LÍNEAS</a:t>
             </a:r>
           </a:p>
         </p:txBody>
@@ -4785,7 +4952,7 @@
         </p:nvSpPr>
         <p:spPr>
           <a:xfrm>
-            <a:off x="640000" y="2800000"/>
+            <a:off x="640000" y="760000"/>
             <a:ext cx="10912000" cy="800000"/>
           </a:xfrm>
           <a:prstGeom prst="rect">
@@ -4801,17 +4968,56 @@
           <a:p>
             <a:pPr>
               <a:spcAft>
-                <a:spcPts val="2160"/>
-              </a:spcAft>
-            </a:pPr>
-            <a:r>
-              <a:rPr sz="4800" b="1">
-                <a:solidFill>
-                  <a:srgbClr val="FBF7EF"/>
+                <a:spcPts val="1710"/>
+              </a:spcAft>
+            </a:pPr>
+            <a:r>
+              <a:rPr sz="3800" b="1">
+                <a:solidFill>
+                  <a:srgbClr val="1F2A44"/>
                 </a:solidFill>
                 <a:latin typeface="Fredoka"/>
               </a:rPr>
-              <a:t>Parecen razones y no lo son</a:t>
+              <a:t>Escríbelo tú primero, sin mirar</a:t>
+            </a:r>
+          </a:p>
+        </p:txBody>
+      </p:sp>
+      <p:sp>
+        <p:nvSpPr>
+          <p:cNvPr id="4" name="TextBox 3"/>
+          <p:cNvSpPr txBox="1"/>
+          <p:nvPr/>
+        </p:nvSpPr>
+        <p:spPr>
+          <a:xfrm>
+            <a:off x="640000" y="1800000"/>
+            <a:ext cx="10912000" cy="1500000"/>
+          </a:xfrm>
+          <a:prstGeom prst="rect">
+            <a:avLst/>
+          </a:prstGeom>
+          <a:noFill/>
+        </p:spPr>
+        <p:txBody>
+          <a:bodyPr wrap="square">
+            <a:spAutoFit/>
+          </a:bodyPr>
+          <a:lstStyle/>
+          <a:p>
+            <a:pPr>
+              <a:spcAft>
+                <a:spcPts val="1170"/>
+              </a:spcAft>
+            </a:pPr>
+            <a:r>
+              <a:rPr sz="2600" b="0">
+                <a:solidFill>
+                  <a:srgbClr val="4A5568"/>
+                </a:solidFill>
+                <a:latin typeface="Nunito Sans"/>
+              </a:rPr>
+              <a:t>Dos minutos. Después lo comparamos.</a:t>
             </a:r>
           </a:p>
         </p:txBody>
@@ -4876,7 +5082,7 @@
                 </a:solidFill>
                 <a:latin typeface="Nunito Sans"/>
               </a:rPr>
-              <a:t>BLOQUE 3 · PARECEN RAZONES Y NO LO SON</a:t>
+              <a:t>LO DE HOY EN TRES LÍNEAS</a:t>
             </a:r>
           </a:p>
         </p:txBody>
@@ -4889,8 +5095,8 @@
         </p:nvSpPr>
         <p:spPr>
           <a:xfrm>
-            <a:off x="640000" y="760000"/>
-            <a:ext cx="10912000" cy="800000"/>
+            <a:off x="640000" y="1300000"/>
+            <a:ext cx="10912000" cy="4800000"/>
           </a:xfrm>
           <a:prstGeom prst="rect">
             <a:avLst/>
@@ -4905,388 +5111,80 @@
           <a:p>
             <a:pPr>
               <a:spcAft>
-                <a:spcPts val="1710"/>
-              </a:spcAft>
-            </a:pPr>
-            <a:r>
-              <a:rPr sz="3800" b="1">
+                <a:spcPts val="1350"/>
+              </a:spcAft>
+            </a:pPr>
+            <a:r>
+              <a:rPr sz="3000" b="1">
+                <a:solidFill>
+                  <a:srgbClr val="E8793A"/>
+                </a:solidFill>
+                <a:latin typeface="Nunito Sans"/>
+              </a:rPr>
+              <a:t>1. </a:t>
+            </a:r>
+            <a:r>
+              <a:rPr sz="3000" b="0">
                 <a:solidFill>
                   <a:srgbClr val="1F2A44"/>
                 </a:solidFill>
-                <a:latin typeface="Fredoka"/>
-              </a:rPr>
-              <a:t>Llevan «porque», pero no son razones</a:t>
-            </a:r>
-          </a:p>
-        </p:txBody>
-      </p:sp>
-      <p:graphicFrame>
-        <p:nvGraphicFramePr>
-          <p:cNvPr id="4" name="Table 3"/>
-          <p:cNvGraphicFramePr>
-            <a:graphicFrameLocks noGrp="1"/>
-          </p:cNvGraphicFramePr>
-          <p:nvPr/>
-        </p:nvGraphicFramePr>
-        <p:xfrm>
-          <a:off x="640000" y="1700000"/>
-          <a:ext cx="10912000" cy="3000000"/>
-        </p:xfrm>
-        <a:graphic>
-          <a:graphicData uri="http://schemas.openxmlformats.org/drawingml/2006/table">
-            <a:tbl>
-              <a:tblPr firstRow="1" bandRow="1">
-                <a:tableStyleId>{5C22544A-7EE6-4342-B048-85BDC9FD1C3A}</a:tableStyleId>
-              </a:tblPr>
-              <a:tblGrid>
-                <a:gridCol w="3637333"/>
-                <a:gridCol w="3637333"/>
-                <a:gridCol w="3637334"/>
-              </a:tblGrid>
-              <a:tr h="600000">
-                <a:tc>
-                  <a:txBody>
-                    <a:bodyPr/>
-                    <a:lstStyle/>
-                    <a:p>
-                      <a:r>
-                        <a:rPr sz="2000" b="1">
-                          <a:solidFill>
-                            <a:srgbClr val="FBF7EF"/>
-                          </a:solidFill>
-                          <a:latin typeface="Fredoka"/>
-                        </a:rPr>
-                        <a:t>Tipo</a:t>
-                      </a:r>
-                    </a:p>
-                  </a:txBody>
-                  <a:tcPr>
-                    <a:solidFill>
-                      <a:srgbClr val="1F2A44"/>
-                    </a:solidFill>
-                  </a:tcPr>
-                </a:tc>
-                <a:tc>
-                  <a:txBody>
-                    <a:bodyPr/>
-                    <a:lstStyle/>
-                    <a:p>
-                      <a:r>
-                        <a:rPr sz="2000" b="1">
-                          <a:solidFill>
-                            <a:srgbClr val="FBF7EF"/>
-                          </a:solidFill>
-                          <a:latin typeface="Fredoka"/>
-                        </a:rPr>
-                        <a:t>Ejemplo</a:t>
-                      </a:r>
-                    </a:p>
-                  </a:txBody>
-                  <a:tcPr>
-                    <a:solidFill>
-                      <a:srgbClr val="1F2A44"/>
-                    </a:solidFill>
-                  </a:tcPr>
-                </a:tc>
-                <a:tc>
-                  <a:txBody>
-                    <a:bodyPr/>
-                    <a:lstStyle/>
-                    <a:p>
-                      <a:r>
-                        <a:rPr sz="2000" b="1">
-                          <a:solidFill>
-                            <a:srgbClr val="FBF7EF"/>
-                          </a:solidFill>
-                          <a:latin typeface="Fredoka"/>
-                        </a:rPr>
-                        <a:t>Por qué no es una razón</a:t>
-                      </a:r>
-                    </a:p>
-                  </a:txBody>
-                  <a:tcPr>
-                    <a:solidFill>
-                      <a:srgbClr val="1F2A44"/>
-                    </a:solidFill>
-                  </a:tcPr>
-                </a:tc>
-              </a:tr>
-              <a:tr h="600000">
-                <a:tc>
-                  <a:txBody>
-                    <a:bodyPr/>
-                    <a:lstStyle/>
-                    <a:p>
-                      <a:r>
-                        <a:rPr sz="2000" b="1">
-                          <a:solidFill>
-                            <a:srgbClr val="1F2A44"/>
-                          </a:solidFill>
-                          <a:latin typeface="Nunito Sans"/>
-                        </a:rPr>
-                        <a:t>Repetir</a:t>
-                      </a:r>
-                    </a:p>
-                  </a:txBody>
-                  <a:tcPr>
-                    <a:solidFill>
-                      <a:srgbClr val="FFFFFF"/>
-                    </a:solidFill>
-                  </a:tcPr>
-                </a:tc>
-                <a:tc>
-                  <a:txBody>
-                    <a:bodyPr/>
-                    <a:lstStyle/>
-                    <a:p>
-                      <a:r>
-                        <a:rPr sz="2000" b="0">
-                          <a:solidFill>
-                            <a:srgbClr val="1F2A44"/>
-                          </a:solidFill>
-                          <a:latin typeface="Nunito Sans"/>
-                        </a:rPr>
-                        <a:t>«Esta serie es la mejor porque es la mejor»</a:t>
-                      </a:r>
-                    </a:p>
-                  </a:txBody>
-                  <a:tcPr>
-                    <a:solidFill>
-                      <a:srgbClr val="FFFFFF"/>
-                    </a:solidFill>
-                  </a:tcPr>
-                </a:tc>
-                <a:tc>
-                  <a:txBody>
-                    <a:bodyPr/>
-                    <a:lstStyle/>
-                    <a:p>
-                      <a:r>
-                        <a:rPr sz="2000" b="0">
-                          <a:solidFill>
-                            <a:srgbClr val="1F2A44"/>
-                          </a:solidFill>
-                          <a:latin typeface="Nunito Sans"/>
-                        </a:rPr>
-                        <a:t>Dice lo mismo dos veces</a:t>
-                      </a:r>
-                    </a:p>
-                  </a:txBody>
-                  <a:tcPr>
-                    <a:solidFill>
-                      <a:srgbClr val="FFFFFF"/>
-                    </a:solidFill>
-                  </a:tcPr>
-                </a:tc>
-              </a:tr>
-              <a:tr h="600000">
-                <a:tc>
-                  <a:txBody>
-                    <a:bodyPr/>
-                    <a:lstStyle/>
-                    <a:p>
-                      <a:r>
-                        <a:rPr sz="2000" b="1">
-                          <a:solidFill>
-                            <a:srgbClr val="1F2A44"/>
-                          </a:solidFill>
-                          <a:latin typeface="Nunito Sans"/>
-                        </a:rPr>
-                        <a:t>Un gusto</a:t>
-                      </a:r>
-                    </a:p>
-                  </a:txBody>
-                  <a:tcPr>
-                    <a:solidFill>
-                      <a:srgbClr val="EAF0F7"/>
-                    </a:solidFill>
-                  </a:tcPr>
-                </a:tc>
-                <a:tc>
-                  <a:txBody>
-                    <a:bodyPr/>
-                    <a:lstStyle/>
-                    <a:p>
-                      <a:r>
-                        <a:rPr sz="2000" b="0">
-                          <a:solidFill>
-                            <a:srgbClr val="1F2A44"/>
-                          </a:solidFill>
-                          <a:latin typeface="Nunito Sans"/>
-                        </a:rPr>
-                        <a:t>«El reguetón es la mejor música, porque me encanta»</a:t>
-                      </a:r>
-                    </a:p>
-                  </a:txBody>
-                  <a:tcPr>
-                    <a:solidFill>
-                      <a:srgbClr val="EAF0F7"/>
-                    </a:solidFill>
-                  </a:tcPr>
-                </a:tc>
-                <a:tc>
-                  <a:txBody>
-                    <a:bodyPr/>
-                    <a:lstStyle/>
-                    <a:p>
-                      <a:r>
-                        <a:rPr sz="2000" b="0">
-                          <a:solidFill>
-                            <a:srgbClr val="1F2A44"/>
-                          </a:solidFill>
-                          <a:latin typeface="Nunito Sans"/>
-                        </a:rPr>
-                        <a:t>Habla de mí, no de todos</a:t>
-                      </a:r>
-                    </a:p>
-                  </a:txBody>
-                  <a:tcPr>
-                    <a:solidFill>
-                      <a:srgbClr val="EAF0F7"/>
-                    </a:solidFill>
-                  </a:tcPr>
-                </a:tc>
-              </a:tr>
-              <a:tr h="600000">
-                <a:tc>
-                  <a:txBody>
-                    <a:bodyPr/>
-                    <a:lstStyle/>
-                    <a:p>
-                      <a:r>
-                        <a:rPr sz="2000" b="1">
-                          <a:solidFill>
-                            <a:srgbClr val="1F2A44"/>
-                          </a:solidFill>
-                          <a:latin typeface="Nunito Sans"/>
-                        </a:rPr>
-                        <a:t>Una amenaza</a:t>
-                      </a:r>
-                    </a:p>
-                  </a:txBody>
-                  <a:tcPr>
-                    <a:solidFill>
-                      <a:srgbClr val="FFFFFF"/>
-                    </a:solidFill>
-                  </a:tcPr>
-                </a:tc>
-                <a:tc>
-                  <a:txBody>
-                    <a:bodyPr/>
-                    <a:lstStyle/>
-                    <a:p>
-                      <a:r>
-                        <a:rPr sz="2000" b="0">
-                          <a:solidFill>
-                            <a:srgbClr val="1F2A44"/>
-                          </a:solidFill>
-                          <a:latin typeface="Nunito Sans"/>
-                        </a:rPr>
-                        <a:t>«Vótame de delegado o no te paso los apuntes»</a:t>
-                      </a:r>
-                    </a:p>
-                  </a:txBody>
-                  <a:tcPr>
-                    <a:solidFill>
-                      <a:srgbClr val="FFFFFF"/>
-                    </a:solidFill>
-                  </a:tcPr>
-                </a:tc>
-                <a:tc>
-                  <a:txBody>
-                    <a:bodyPr/>
-                    <a:lstStyle/>
-                    <a:p>
-                      <a:r>
-                        <a:rPr sz="2000" b="0">
-                          <a:solidFill>
-                            <a:srgbClr val="1F2A44"/>
-                          </a:solidFill>
-                          <a:latin typeface="Nunito Sans"/>
-                        </a:rPr>
-                        <a:t>Solo mete miedo</a:t>
-                      </a:r>
-                    </a:p>
-                  </a:txBody>
-                  <a:tcPr>
-                    <a:solidFill>
-                      <a:srgbClr val="FFFFFF"/>
-                    </a:solidFill>
-                  </a:tcPr>
-                </a:tc>
-              </a:tr>
-              <a:tr h="600000">
-                <a:tc>
-                  <a:txBody>
-                    <a:bodyPr/>
-                    <a:lstStyle/>
-                    <a:p>
-                      <a:r>
-                        <a:rPr sz="2000" b="1">
-                          <a:solidFill>
-                            <a:srgbClr val="1F2A44"/>
-                          </a:solidFill>
-                          <a:latin typeface="Nunito Sans"/>
-                        </a:rPr>
-                        <a:t>Un insulto</a:t>
-                      </a:r>
-                    </a:p>
-                  </a:txBody>
-                  <a:tcPr>
-                    <a:solidFill>
-                      <a:srgbClr val="EAF0F7"/>
-                    </a:solidFill>
-                  </a:tcPr>
-                </a:tc>
-                <a:tc>
-                  <a:txBody>
-                    <a:bodyPr/>
-                    <a:lstStyle/>
-                    <a:p>
-                      <a:r>
-                        <a:rPr sz="2000" b="0">
-                          <a:solidFill>
-                            <a:srgbClr val="1F2A44"/>
-                          </a:solidFill>
-                          <a:latin typeface="Nunito Sans"/>
-                        </a:rPr>
-                        <a:t>«Eso es una tontería, porque eres un pringado»</a:t>
-                      </a:r>
-                    </a:p>
-                  </a:txBody>
-                  <a:tcPr>
-                    <a:solidFill>
-                      <a:srgbClr val="EAF0F7"/>
-                    </a:solidFill>
-                  </a:tcPr>
-                </a:tc>
-                <a:tc>
-                  <a:txBody>
-                    <a:bodyPr/>
-                    <a:lstStyle/>
-                    <a:p>
-                      <a:r>
-                        <a:rPr sz="2000" b="0">
-                          <a:solidFill>
-                            <a:srgbClr val="1F2A44"/>
-                          </a:solidFill>
-                          <a:latin typeface="Nunito Sans"/>
-                        </a:rPr>
-                        <a:t>Ataca a quien habla, no a lo que dice</a:t>
-                      </a:r>
-                    </a:p>
-                  </a:txBody>
-                  <a:tcPr>
-                    <a:solidFill>
-                      <a:srgbClr val="EAF0F7"/>
-                    </a:solidFill>
-                  </a:tcPr>
-                </a:tc>
-              </a:tr>
-            </a:tbl>
-          </a:graphicData>
-        </a:graphic>
-      </p:graphicFrame>
+                <a:latin typeface="Nunito Sans"/>
+              </a:rPr>
+              <a:t>Ad populum es creer que algo es verdad o está bien solo porque lo hacen muchos.</a:t>
+            </a:r>
+          </a:p>
+          <a:p>
+            <a:pPr>
+              <a:spcAft>
+                <a:spcPts val="1350"/>
+              </a:spcAft>
+            </a:pPr>
+            <a:r>
+              <a:rPr sz="3000" b="1">
+                <a:solidFill>
+                  <a:srgbClr val="E8793A"/>
+                </a:solidFill>
+                <a:latin typeface="Nunito Sans"/>
+              </a:rPr>
+              <a:t>2. </a:t>
+            </a:r>
+            <a:r>
+              <a:rPr sz="3000" b="0">
+                <a:solidFill>
+                  <a:srgbClr val="1F2A44"/>
+                </a:solidFill>
+                <a:latin typeface="Nunito Sans"/>
+              </a:rPr>
+              <a:t>La prueba social es el atajo de copiar a los demás cuando no sabemos qué hacer.</a:t>
+            </a:r>
+          </a:p>
+          <a:p>
+            <a:pPr>
+              <a:spcAft>
+                <a:spcPts val="1350"/>
+              </a:spcAft>
+            </a:pPr>
+            <a:r>
+              <a:rPr sz="3000" b="1">
+                <a:solidFill>
+                  <a:srgbClr val="E8793A"/>
+                </a:solidFill>
+                <a:latin typeface="Nunito Sans"/>
+              </a:rPr>
+              <a:t>3. </a:t>
+            </a:r>
+            <a:r>
+              <a:rPr sz="3000" b="0">
+                <a:solidFill>
+                  <a:srgbClr val="1F2A44"/>
+                </a:solidFill>
+                <a:latin typeface="Nunito Sans"/>
+              </a:rPr>
+              <a:t>Que muchos lo hagan puede ser una pista, pero no es una prueba.</a:t>
+            </a:r>
+          </a:p>
+        </p:txBody>
+      </p:sp>
     </p:spTree>
   </p:cSld>
   <p:clrMapOvr>
@@ -5296,312 +5194,6 @@
 </file>
 
 <file path=ppt/slides/slide16.xml><?xml version="1.0" encoding="utf-8"?>
-<p:sld xmlns:a="http://schemas.openxmlformats.org/drawingml/2006/main" xmlns:p="http://schemas.openxmlformats.org/presentationml/2006/main" xmlns:r="http://schemas.openxmlformats.org/officeDocument/2006/relationships">
-  <p:cSld>
-    <p:bg>
-      <p:bgPr>
-        <a:solidFill>
-          <a:srgbClr val="FBF7EF"/>
-        </a:solidFill>
-        <a:effectLst/>
-      </p:bgPr>
-    </p:bg>
-    <p:spTree>
-      <p:nvGrpSpPr>
-        <p:cNvPr id="1" name=""/>
-        <p:cNvGrpSpPr/>
-        <p:nvPr/>
-      </p:nvGrpSpPr>
-      <p:grpSpPr/>
-      <p:sp>
-        <p:nvSpPr>
-          <p:cNvPr id="2" name="TextBox 1"/>
-          <p:cNvSpPr txBox="1"/>
-          <p:nvPr/>
-        </p:nvSpPr>
-        <p:spPr>
-          <a:xfrm>
-            <a:off x="640000" y="380000"/>
-            <a:ext cx="10912000" cy="420000"/>
-          </a:xfrm>
-          <a:prstGeom prst="rect">
-            <a:avLst/>
-          </a:prstGeom>
-          <a:noFill/>
-        </p:spPr>
-        <p:txBody>
-          <a:bodyPr wrap="square">
-            <a:spAutoFit/>
-          </a:bodyPr>
-          <a:lstStyle/>
-          <a:p>
-            <a:pPr>
-              <a:spcAft>
-                <a:spcPts val="630"/>
-              </a:spcAft>
-            </a:pPr>
-            <a:r>
-              <a:rPr sz="1400" b="1">
-                <a:solidFill>
-                  <a:srgbClr val="E8793A"/>
-                </a:solidFill>
-                <a:latin typeface="Nunito Sans"/>
-              </a:rPr>
-              <a:t>LO DE HOY EN TRES LÍNEAS</a:t>
-            </a:r>
-          </a:p>
-        </p:txBody>
-      </p:sp>
-      <p:sp>
-        <p:nvSpPr>
-          <p:cNvPr id="3" name="TextBox 2"/>
-          <p:cNvSpPr txBox="1"/>
-          <p:nvPr/>
-        </p:nvSpPr>
-        <p:spPr>
-          <a:xfrm>
-            <a:off x="640000" y="760000"/>
-            <a:ext cx="10912000" cy="800000"/>
-          </a:xfrm>
-          <a:prstGeom prst="rect">
-            <a:avLst/>
-          </a:prstGeom>
-          <a:noFill/>
-        </p:spPr>
-        <p:txBody>
-          <a:bodyPr wrap="square">
-            <a:spAutoFit/>
-          </a:bodyPr>
-          <a:lstStyle/>
-          <a:p>
-            <a:pPr>
-              <a:spcAft>
-                <a:spcPts val="1710"/>
-              </a:spcAft>
-            </a:pPr>
-            <a:r>
-              <a:rPr sz="3800" b="1">
-                <a:solidFill>
-                  <a:srgbClr val="1F2A44"/>
-                </a:solidFill>
-                <a:latin typeface="Fredoka"/>
-              </a:rPr>
-              <a:t>Escríbelo tú primero, sin mirar</a:t>
-            </a:r>
-          </a:p>
-        </p:txBody>
-      </p:sp>
-      <p:sp>
-        <p:nvSpPr>
-          <p:cNvPr id="4" name="TextBox 3"/>
-          <p:cNvSpPr txBox="1"/>
-          <p:nvPr/>
-        </p:nvSpPr>
-        <p:spPr>
-          <a:xfrm>
-            <a:off x="640000" y="1800000"/>
-            <a:ext cx="10912000" cy="1500000"/>
-          </a:xfrm>
-          <a:prstGeom prst="rect">
-            <a:avLst/>
-          </a:prstGeom>
-          <a:noFill/>
-        </p:spPr>
-        <p:txBody>
-          <a:bodyPr wrap="square">
-            <a:spAutoFit/>
-          </a:bodyPr>
-          <a:lstStyle/>
-          <a:p>
-            <a:pPr>
-              <a:spcAft>
-                <a:spcPts val="1170"/>
-              </a:spcAft>
-            </a:pPr>
-            <a:r>
-              <a:rPr sz="2600" b="0">
-                <a:solidFill>
-                  <a:srgbClr val="4A5568"/>
-                </a:solidFill>
-                <a:latin typeface="Nunito Sans"/>
-              </a:rPr>
-              <a:t>Dos minutos. Después lo comparamos.</a:t>
-            </a:r>
-          </a:p>
-        </p:txBody>
-      </p:sp>
-    </p:spTree>
-  </p:cSld>
-  <p:clrMapOvr>
-    <a:masterClrMapping/>
-  </p:clrMapOvr>
-</p:sld>
-</file>
-
-<file path=ppt/slides/slide17.xml><?xml version="1.0" encoding="utf-8"?>
-<p:sld xmlns:a="http://schemas.openxmlformats.org/drawingml/2006/main" xmlns:p="http://schemas.openxmlformats.org/presentationml/2006/main" xmlns:r="http://schemas.openxmlformats.org/officeDocument/2006/relationships">
-  <p:cSld>
-    <p:bg>
-      <p:bgPr>
-        <a:solidFill>
-          <a:srgbClr val="FBF7EF"/>
-        </a:solidFill>
-        <a:effectLst/>
-      </p:bgPr>
-    </p:bg>
-    <p:spTree>
-      <p:nvGrpSpPr>
-        <p:cNvPr id="1" name=""/>
-        <p:cNvGrpSpPr/>
-        <p:nvPr/>
-      </p:nvGrpSpPr>
-      <p:grpSpPr/>
-      <p:sp>
-        <p:nvSpPr>
-          <p:cNvPr id="2" name="TextBox 1"/>
-          <p:cNvSpPr txBox="1"/>
-          <p:nvPr/>
-        </p:nvSpPr>
-        <p:spPr>
-          <a:xfrm>
-            <a:off x="640000" y="380000"/>
-            <a:ext cx="10912000" cy="420000"/>
-          </a:xfrm>
-          <a:prstGeom prst="rect">
-            <a:avLst/>
-          </a:prstGeom>
-          <a:noFill/>
-        </p:spPr>
-        <p:txBody>
-          <a:bodyPr wrap="square">
-            <a:spAutoFit/>
-          </a:bodyPr>
-          <a:lstStyle/>
-          <a:p>
-            <a:pPr>
-              <a:spcAft>
-                <a:spcPts val="630"/>
-              </a:spcAft>
-            </a:pPr>
-            <a:r>
-              <a:rPr sz="1400" b="1">
-                <a:solidFill>
-                  <a:srgbClr val="E8793A"/>
-                </a:solidFill>
-                <a:latin typeface="Nunito Sans"/>
-              </a:rPr>
-              <a:t>LO DE HOY EN TRES LÍNEAS</a:t>
-            </a:r>
-          </a:p>
-        </p:txBody>
-      </p:sp>
-      <p:sp>
-        <p:nvSpPr>
-          <p:cNvPr id="3" name="TextBox 2"/>
-          <p:cNvSpPr txBox="1"/>
-          <p:nvPr/>
-        </p:nvSpPr>
-        <p:spPr>
-          <a:xfrm>
-            <a:off x="640000" y="1300000"/>
-            <a:ext cx="10912000" cy="4800000"/>
-          </a:xfrm>
-          <a:prstGeom prst="rect">
-            <a:avLst/>
-          </a:prstGeom>
-          <a:noFill/>
-        </p:spPr>
-        <p:txBody>
-          <a:bodyPr wrap="square">
-            <a:spAutoFit/>
-          </a:bodyPr>
-          <a:lstStyle/>
-          <a:p>
-            <a:pPr>
-              <a:spcAft>
-                <a:spcPts val="1350"/>
-              </a:spcAft>
-            </a:pPr>
-            <a:r>
-              <a:rPr sz="3000" b="1">
-                <a:solidFill>
-                  <a:srgbClr val="E8793A"/>
-                </a:solidFill>
-                <a:latin typeface="Nunito Sans"/>
-              </a:rPr>
-              <a:t>1. </a:t>
-            </a:r>
-            <a:r>
-              <a:rPr sz="3000" b="0">
-                <a:solidFill>
-                  <a:srgbClr val="1F2A44"/>
-                </a:solidFill>
-                <a:latin typeface="Nunito Sans"/>
-              </a:rPr>
-              <a:t>Una buena razón pasa tres preguntas: ¿es verdad?, ¿viene a cuento?, ¿es suficiente?</a:t>
-            </a:r>
-          </a:p>
-          <a:p>
-            <a:pPr>
-              <a:spcAft>
-                <a:spcPts val="1350"/>
-              </a:spcAft>
-            </a:pPr>
-            <a:r>
-              <a:rPr sz="3000" b="1">
-                <a:solidFill>
-                  <a:srgbClr val="E8793A"/>
-                </a:solidFill>
-                <a:latin typeface="Nunito Sans"/>
-              </a:rPr>
-              <a:t>2. </a:t>
-            </a:r>
-            <a:r>
-              <a:rPr sz="3000" b="0">
-                <a:solidFill>
-                  <a:srgbClr val="1F2A44"/>
-                </a:solidFill>
-                <a:latin typeface="Nunito Sans"/>
-              </a:rPr>
-              <a:t>Si falla una de las tres, la razón no sirve para esa conclusión.</a:t>
-            </a:r>
-          </a:p>
-          <a:p>
-            <a:pPr>
-              <a:spcAft>
-                <a:spcPts val="1350"/>
-              </a:spcAft>
-            </a:pPr>
-            <a:r>
-              <a:rPr sz="3000" b="1">
-                <a:solidFill>
-                  <a:srgbClr val="E8793A"/>
-                </a:solidFill>
-                <a:latin typeface="Nunito Sans"/>
-              </a:rPr>
-              <a:t>3. </a:t>
-            </a:r>
-            <a:r>
-              <a:rPr sz="3000" b="0">
-                <a:solidFill>
-                  <a:srgbClr val="1F2A44"/>
-                </a:solidFill>
-                <a:latin typeface="Nunito Sans"/>
-              </a:rPr>
-              <a:t>Repetir, un gusto, una amenaza o un insulto no son razones, aunque lleven «porque».</a:t>
-            </a:r>
-          </a:p>
-        </p:txBody>
-      </p:sp>
-    </p:spTree>
-  </p:cSld>
-  <p:clrMapOvr>
-    <a:masterClrMapping/>
-  </p:clrMapOvr>
-</p:sld>
-</file>
-
-<file path=ppt/slides/slide18.xml><?xml version="1.0" encoding="utf-8"?>
 <p:sld xmlns:a="http://schemas.openxmlformats.org/drawingml/2006/main" xmlns:p="http://schemas.openxmlformats.org/presentationml/2006/main" xmlns:r="http://schemas.openxmlformats.org/officeDocument/2006/relationships">
   <p:cSld>
     <p:bg>
@@ -5692,7 +5284,7 @@
                 </a:solidFill>
                 <a:latin typeface="Fredoka"/>
               </a:rPr>
-              <a:t>Monty Python, «La clínica de las discusiones», subtitulada en español</a:t>
+              <a:t>La prueba social: por qué copiamos lo que hacen los demás</a:t>
             </a:r>
           </a:p>
         </p:txBody>
@@ -5731,7 +5323,7 @@
                 </a:solidFill>
                 <a:latin typeface="Nunito Sans"/>
               </a:rPr>
-              <a:t>Ver con humor que llevar la contraria no es dar razones. Revisarlo antes: es humor británico de los años 70.</a:t>
+              <a:t>Que vean ejemplos reales de personas que copian lo que hace el grupo sin saber por qué.</a:t>
             </a:r>
           </a:p>
         </p:txBody>
@@ -5744,7 +5336,7 @@
 </p:sld>
 </file>
 
-<file path=ppt/slides/slide19.xml><?xml version="1.0" encoding="utf-8"?>
+<file path=ppt/slides/slide17.xml><?xml version="1.0" encoding="utf-8"?>
 <p:sld xmlns:a="http://schemas.openxmlformats.org/drawingml/2006/main" xmlns:p="http://schemas.openxmlformats.org/presentationml/2006/main" xmlns:r="http://schemas.openxmlformats.org/officeDocument/2006/relationships">
   <p:cSld>
     <p:bg>
@@ -6389,7 +5981,7 @@
                 </a:solidFill>
                 <a:latin typeface="Nunito Sans"/>
               </a:rPr>
-              <a:t>Al reconstruir, quito lo que ______: adornos, repeticiones, insultos.  (sesión 8)</a:t>
+              <a:t>Fiarse de un experto de ______, en su campo, no es falacia de autoridad.  (sesión 8)</a:t>
             </a:r>
           </a:p>
           <a:p>
@@ -6414,7 +6006,7 @@
                 </a:solidFill>
                 <a:latin typeface="Nunito Sans"/>
               </a:rPr>
-              <a:t>Al reconstruir el argumento de otro, hay que ______ lo que dijo.  (sesión 8)</a:t>
+              <a:t>La falacia de autoridad es creer algo solo porque lo dice alguien ______ o famoso, aunque no sea experto en ese tema.  (sesión 8)</a:t>
             </a:r>
           </a:p>
           <a:p>
@@ -6439,7 +6031,7 @@
                 </a:solidFill>
                 <a:latin typeface="Nunito Sans"/>
               </a:rPr>
-              <a:t>«¿Cómo lo sabes?» pide la ______ y las razones.  (sesión 4)</a:t>
+              <a:t>Manipular es ______ el juicio del otro con trucos.  (sesión 4)</a:t>
             </a:r>
           </a:p>
         </p:txBody>
@@ -6591,7 +6183,7 @@
                 </a:solidFill>
                 <a:latin typeface="Nunito Sans"/>
               </a:rPr>
-              <a:t>Al reconstruir, quito lo que </a:t>
+              <a:t>Fiarse de un experto de </a:t>
             </a:r>
             <a:r>
               <a:rPr sz="2600" b="1">
@@ -6600,7 +6192,7 @@
                 </a:solidFill>
                 <a:latin typeface="Nunito Sans"/>
               </a:rPr>
-              <a:t>sobra</a:t>
+              <a:t>verdad</a:t>
             </a:r>
             <a:r>
               <a:rPr sz="2600" b="0">
@@ -6609,7 +6201,7 @@
                 </a:solidFill>
                 <a:latin typeface="Nunito Sans"/>
               </a:rPr>
-              <a:t>: adornos, repeticiones, insultos.  (sesión 8)</a:t>
+              <a:t>, en su campo, no es falacia de autoridad.  (sesión 8)</a:t>
             </a:r>
           </a:p>
           <a:p>
@@ -6634,7 +6226,7 @@
                 </a:solidFill>
                 <a:latin typeface="Nunito Sans"/>
               </a:rPr>
-              <a:t>Al reconstruir el argumento de otro, hay que </a:t>
+              <a:t>La falacia de autoridad es creer algo solo porque lo dice alguien </a:t>
             </a:r>
             <a:r>
               <a:rPr sz="2600" b="1">
@@ -6643,7 +6235,7 @@
                 </a:solidFill>
                 <a:latin typeface="Nunito Sans"/>
               </a:rPr>
-              <a:t>respetar</a:t>
+              <a:t>importante</a:t>
             </a:r>
             <a:r>
               <a:rPr sz="2600" b="0">
@@ -6652,7 +6244,7 @@
                 </a:solidFill>
                 <a:latin typeface="Nunito Sans"/>
               </a:rPr>
-              <a:t> lo que dijo.  (sesión 8)</a:t>
+              <a:t> o famoso, aunque no sea experto en ese tema.  (sesión 8)</a:t>
             </a:r>
           </a:p>
           <a:p>
@@ -6677,7 +6269,7 @@
                 </a:solidFill>
                 <a:latin typeface="Nunito Sans"/>
               </a:rPr>
-              <a:t>«¿Cómo lo sabes?» pide la </a:t>
+              <a:t>Manipular es </a:t>
             </a:r>
             <a:r>
               <a:rPr sz="2600" b="1">
@@ -6686,7 +6278,7 @@
                 </a:solidFill>
                 <a:latin typeface="Nunito Sans"/>
               </a:rPr>
-              <a:t>fuente</a:t>
+              <a:t>esquivar</a:t>
             </a:r>
             <a:r>
               <a:rPr sz="2600" b="0">
@@ -6695,7 +6287,7 @@
                 </a:solidFill>
                 <a:latin typeface="Nunito Sans"/>
               </a:rPr>
-              <a:t> y las razones.  (sesión 4)</a:t>
+              <a:t> el juicio del otro con trucos.  (sesión 4)</a:t>
             </a:r>
           </a:p>
         </p:txBody>
@@ -6842,7 +6434,7 @@
                 </a:solidFill>
                 <a:latin typeface="Nunito Sans"/>
               </a:rPr>
-              <a:t>«Convencedme de que hoy no ponga deberes.» «Porque no.» «Porque eres el mejor profe.» «Porque mañana tenemos examen de Matemáticas.»</a:t>
+              <a:t>Un vídeo tiene diez millones de «me gusta». Un restaurante tiene una cola que da la vuelta a la esquina.</a:t>
             </a:r>
           </a:p>
         </p:txBody>
@@ -6881,7 +6473,7 @@
                 </a:solidFill>
                 <a:latin typeface="Nunito Sans"/>
               </a:rPr>
-              <a:t>¿Cuál te parece una razón de verdad?</a:t>
+              <a:t>¿Eso te dice que el vídeo es verdad? ¿Que en el restaurante se come bien?</a:t>
             </a:r>
           </a:p>
         </p:txBody>
@@ -6985,7 +6577,7 @@
                 </a:solidFill>
                 <a:latin typeface="Fredoka"/>
               </a:rPr>
-              <a:t>Tres preguntas para una razón</a:t>
+              <a:t>La mayoría y la prueba social</a:t>
             </a:r>
           </a:p>
         </p:txBody>
@@ -7050,7 +6642,7 @@
                 </a:solidFill>
                 <a:latin typeface="Nunito Sans"/>
               </a:rPr>
-              <a:t>BLOQUE 1 · TRES PREGUNTAS PARA UNA RAZÓN</a:t>
+              <a:t>BLOQUE 1 · LA MAYORÍA Y LA PRUEBA SOCIAL</a:t>
             </a:r>
           </a:p>
         </p:txBody>
@@ -7089,14 +6681,57 @@
                 </a:solidFill>
                 <a:latin typeface="Fredoka"/>
               </a:rPr>
-              <a:t>Tres preguntas, en orden</a:t>
-            </a:r>
-          </a:p>
-        </p:txBody>
-      </p:sp>
-      <p:sp>
-        <p:nvSpPr>
-          <p:cNvPr id="4" name="TextBox 3"/>
+              <a:t>Apelación a la mayoría (ad populum)</a:t>
+            </a:r>
+          </a:p>
+        </p:txBody>
+      </p:sp>
+      <p:sp>
+        <p:nvSpPr>
+          <p:cNvPr id="4" name="Rectangle 3"/>
+          <p:cNvSpPr/>
+          <p:nvPr/>
+        </p:nvSpPr>
+        <p:spPr>
+          <a:xfrm>
+            <a:off x="640000" y="1650000"/>
+            <a:ext cx="10912000" cy="1150000"/>
+          </a:xfrm>
+          <a:prstGeom prst="rect">
+            <a:avLst/>
+          </a:prstGeom>
+          <a:solidFill>
+            <a:srgbClr val="EAF0F7"/>
+          </a:solidFill>
+          <a:ln>
+            <a:noFill/>
+          </a:ln>
+        </p:spPr>
+        <p:style>
+          <a:lnRef idx="1">
+            <a:schemeClr val="accent1"/>
+          </a:lnRef>
+          <a:fillRef idx="3">
+            <a:schemeClr val="accent1"/>
+          </a:fillRef>
+          <a:effectRef idx="2">
+            <a:schemeClr val="accent1"/>
+          </a:effectRef>
+          <a:fontRef idx="minor">
+            <a:schemeClr val="lt1"/>
+          </a:fontRef>
+        </p:style>
+        <p:txBody>
+          <a:bodyPr rtlCol="0" anchor="ctr"/>
+          <a:lstStyle/>
+          <a:p>
+            <a:pPr algn="ctr"/>
+          </a:p>
+        </p:txBody>
+      </p:sp>
+      <p:sp>
+        <p:nvSpPr>
+          <p:cNvPr id="5" name="TextBox 4"/>
           <p:cNvSpPr txBox="1"/>
           <p:nvPr/>
         </p:nvSpPr>
@@ -7118,42 +6753,24 @@
           <a:p>
             <a:pPr>
               <a:spcAft>
-                <a:spcPts val="1080"/>
-              </a:spcAft>
-            </a:pPr>
-            <a:r>
-              <a:rPr sz="2400" b="0">
+                <a:spcPts val="1260"/>
+              </a:spcAft>
+            </a:pPr>
+            <a:r>
+              <a:rPr sz="2800" b="1">
                 <a:solidFill>
                   <a:srgbClr val="1F2A44"/>
                 </a:solidFill>
                 <a:latin typeface="Nunito Sans"/>
               </a:rPr>
-              <a:t>Se hacen </a:t>
-            </a:r>
-            <a:r>
-              <a:rPr sz="2400" b="1">
-                <a:solidFill>
-                  <a:srgbClr val="1F2A44"/>
-                </a:solidFill>
-                <a:latin typeface="Nunito Sans"/>
-              </a:rPr>
-              <a:t>en orden</a:t>
-            </a:r>
-            <a:r>
-              <a:rPr sz="2400" b="0">
-                <a:solidFill>
-                  <a:srgbClr val="1F2A44"/>
-                </a:solidFill>
-                <a:latin typeface="Nunito Sans"/>
-              </a:rPr>
-              <a:t>. Si falla una, la razón no sirve para esa conclusión.</a:t>
-            </a:r>
-          </a:p>
-        </p:txBody>
-      </p:sp>
-      <p:sp>
-        <p:nvSpPr>
-          <p:cNvPr id="5" name="TextBox 4"/>
+              <a:t>Decir que algo es verdad o está bien solo porque mucha gente lo cree o lo hace.</a:t>
+            </a:r>
+          </a:p>
+        </p:txBody>
+      </p:sp>
+      <p:sp>
+        <p:nvSpPr>
+          <p:cNvPr id="6" name="TextBox 5"/>
           <p:cNvSpPr txBox="1"/>
           <p:nvPr/>
         </p:nvSpPr>
@@ -7194,16 +6811,41 @@
                 </a:solidFill>
                 <a:latin typeface="Nunito Sans"/>
               </a:rPr>
-              <a:t>1. </a:t>
-            </a:r>
+              <a:t>«Todo el mundo lo hace», «millones no pueden equivocarse»</a:t>
+            </a:r>
+          </a:p>
+          <a:p>
+            <a:pPr>
+              <a:spcAft>
+                <a:spcPts val="1260"/>
+              </a:spcAft>
+            </a:pPr>
             <a:r>
               <a:rPr sz="2800" b="1">
                 <a:solidFill>
+                  <a:srgbClr val="E8793A"/>
+                </a:solidFill>
+                <a:latin typeface="Nunito Sans"/>
+              </a:rPr>
+              <a:t>• </a:t>
+            </a:r>
+            <a:r>
+              <a:rPr sz="2800" b="0">
+                <a:solidFill>
                   <a:srgbClr val="1F2A44"/>
                 </a:solidFill>
                 <a:latin typeface="Nunito Sans"/>
               </a:rPr>
-              <a:t>¿Es verdad?</a:t>
+              <a:t>Que muchos lo crean no es </a:t>
+            </a:r>
+            <a:r>
+              <a:rPr sz="2800" b="1">
+                <a:solidFill>
+                  <a:srgbClr val="1F2A44"/>
+                </a:solidFill>
+                <a:latin typeface="Nunito Sans"/>
+              </a:rPr>
+              <a:t>prueba</a:t>
             </a:r>
             <a:r>
               <a:rPr sz="2800" b="0">
@@ -7212,7 +6854,7 @@
                 </a:solidFill>
                 <a:latin typeface="Nunito Sans"/>
               </a:rPr>
-              <a:t> ¿O, al menos, es creíble?</a:t>
+              <a:t>: la mayoría también falla</a:t>
             </a:r>
           </a:p>
           <a:p>
@@ -7237,111 +6879,7 @@
                 </a:solidFill>
                 <a:latin typeface="Nunito Sans"/>
               </a:rPr>
-              <a:t>2. </a:t>
-            </a:r>
-            <a:r>
-              <a:rPr sz="2800" b="1">
-                <a:solidFill>
-                  <a:srgbClr val="1F2A44"/>
-                </a:solidFill>
-                <a:latin typeface="Nunito Sans"/>
-              </a:rPr>
-              <a:t>¿Viene a cuento?</a:t>
-            </a:r>
-            <a:r>
-              <a:rPr sz="2800" b="0">
-                <a:solidFill>
-                  <a:srgbClr val="1F2A44"/>
-                </a:solidFill>
-                <a:latin typeface="Nunito Sans"/>
-              </a:rPr>
-              <a:t> Es decir: ¿tiene que ver con la conclusión?</a:t>
-            </a:r>
-          </a:p>
-          <a:p>
-            <a:pPr>
-              <a:spcAft>
-                <a:spcPts val="1260"/>
-              </a:spcAft>
-            </a:pPr>
-            <a:r>
-              <a:rPr sz="2800" b="1">
-                <a:solidFill>
-                  <a:srgbClr val="E8793A"/>
-                </a:solidFill>
-                <a:latin typeface="Nunito Sans"/>
-              </a:rPr>
-              <a:t>• </a:t>
-            </a:r>
-            <a:r>
-              <a:rPr sz="2800" b="0">
-                <a:solidFill>
-                  <a:srgbClr val="1F2A44"/>
-                </a:solidFill>
-                <a:latin typeface="Nunito Sans"/>
-              </a:rPr>
-              <a:t>3. </a:t>
-            </a:r>
-            <a:r>
-              <a:rPr sz="2800" b="1">
-                <a:solidFill>
-                  <a:srgbClr val="1F2A44"/>
-                </a:solidFill>
-                <a:latin typeface="Nunito Sans"/>
-              </a:rPr>
-              <a:t>¿Es suficiente?</a:t>
-            </a:r>
-            <a:r>
-              <a:rPr sz="2800" b="0">
-                <a:solidFill>
-                  <a:srgbClr val="1F2A44"/>
-                </a:solidFill>
-                <a:latin typeface="Nunito Sans"/>
-              </a:rPr>
-              <a:t> ¿Basta, o hace falta más?</a:t>
-            </a:r>
-          </a:p>
-          <a:p>
-            <a:pPr>
-              <a:spcAft>
-                <a:spcPts val="1260"/>
-              </a:spcAft>
-            </a:pPr>
-            <a:r>
-              <a:rPr sz="2800" b="1">
-                <a:solidFill>
-                  <a:srgbClr val="E8793A"/>
-                </a:solidFill>
-                <a:latin typeface="Nunito Sans"/>
-              </a:rPr>
-              <a:t>• </a:t>
-            </a:r>
-            <a:r>
-              <a:rPr sz="2800" b="0">
-                <a:solidFill>
-                  <a:srgbClr val="1F2A44"/>
-                </a:solidFill>
-                <a:latin typeface="Nunito Sans"/>
-              </a:rPr>
-              <a:t>Una </a:t>
-            </a:r>
-            <a:r>
-              <a:rPr sz="2800" b="1">
-                <a:solidFill>
-                  <a:srgbClr val="1F2A44"/>
-                </a:solidFill>
-                <a:latin typeface="Nunito Sans"/>
-              </a:rPr>
-              <a:t>buena</a:t>
-            </a:r>
-            <a:r>
-              <a:rPr sz="2800" b="0">
-                <a:solidFill>
-                  <a:srgbClr val="1F2A44"/>
-                </a:solidFill>
-                <a:latin typeface="Nunito Sans"/>
-              </a:rPr>
-              <a:t> razón pasa las tres</a:t>
+              <a:t>Antes, casi todos creían que el Sol giraba alrededor de la Tierra</a:t>
             </a:r>
           </a:p>
         </p:txBody>
@@ -7406,7 +6944,7 @@
                 </a:solidFill>
                 <a:latin typeface="Nunito Sans"/>
               </a:rPr>
-              <a:t>BLOQUE 1 · TRES PREGUNTAS PARA UNA RAZÓN</a:t>
+              <a:t>BLOQUE 1 · LA MAYORÍA Y LA PRUEBA SOCIAL</a:t>
             </a:r>
           </a:p>
         </p:txBody>
@@ -7445,7 +6983,7 @@
                 </a:solidFill>
                 <a:latin typeface="Fredoka"/>
               </a:rPr>
-              <a:t>1 · ¿Es verdad?</a:t>
+              <a:t>Prueba social</a:t>
             </a:r>
           </a:p>
         </p:txBody>
@@ -7527,25 +7065,7 @@
                 </a:solidFill>
                 <a:latin typeface="Nunito Sans"/>
               </a:rPr>
-              <a:t>Si la razón es </a:t>
-            </a:r>
-            <a:r>
-              <a:rPr sz="2800" b="1">
-                <a:solidFill>
-                  <a:srgbClr val="1F2A44"/>
-                </a:solidFill>
-                <a:latin typeface="Nunito Sans"/>
-              </a:rPr>
-              <a:t>falsa</a:t>
-            </a:r>
-            <a:r>
-              <a:rPr sz="2800" b="1">
-                <a:solidFill>
-                  <a:srgbClr val="1F2A44"/>
-                </a:solidFill>
-                <a:latin typeface="Nunito Sans"/>
-              </a:rPr>
-              <a:t>, el argumento se cae. No hace falta seguir.</a:t>
+              <a:t>Es copiar lo que hacen los demás cuando no sabemos qué hacer. Es un atajo de la mente.</a:t>
             </a:r>
           </a:p>
         </p:txBody>
@@ -7593,7 +7113,7 @@
                 </a:solidFill>
                 <a:latin typeface="Nunito Sans"/>
               </a:rPr>
-              <a:t>«Con cuatro horas de sueño tienes de sobra»</a:t>
+              <a:t>Si hay cola, pensamos que algo es bueno</a:t>
             </a:r>
           </a:p>
           <a:p>
@@ -7618,7 +7138,32 @@
                 </a:solidFill>
                 <a:latin typeface="Nunito Sans"/>
               </a:rPr>
-              <a:t>Falso: a tu edad se recomiendan entre 8 y 10 horas</a:t>
+              <a:t>Si tiene muchos «me gusta», nos parece verdad</a:t>
+            </a:r>
+          </a:p>
+          <a:p>
+            <a:pPr>
+              <a:spcAft>
+                <a:spcPts val="1260"/>
+              </a:spcAft>
+            </a:pPr>
+            <a:r>
+              <a:rPr sz="2800" b="1">
+                <a:solidFill>
+                  <a:srgbClr val="E8793A"/>
+                </a:solidFill>
+                <a:latin typeface="Nunito Sans"/>
+              </a:rPr>
+              <a:t>• </a:t>
+            </a:r>
+            <a:r>
+              <a:rPr sz="2800" b="0">
+                <a:solidFill>
+                  <a:srgbClr val="1F2A44"/>
+                </a:solidFill>
+                <a:latin typeface="Nunito Sans"/>
+              </a:rPr>
+              <a:t>A veces ayuda; a veces nos engaña</a:t>
             </a:r>
           </a:p>
         </p:txBody>
@@ -7683,7 +7228,7 @@
                 </a:solidFill>
                 <a:latin typeface="Nunito Sans"/>
               </a:rPr>
-              <a:t>BLOQUE 1 · TRES PREGUNTAS PARA UNA RAZÓN</a:t>
+              <a:t>BLOQUE 1 · LA MAYORÍA Y LA PRUEBA SOCIAL</a:t>
             </a:r>
           </a:p>
         </p:txBody>
@@ -7722,7 +7267,7 @@
                 </a:solidFill>
                 <a:latin typeface="Fredoka"/>
               </a:rPr>
-              <a:t>2 · ¿Viene a cuento?</a:t>
+              <a:t>¿Cuándo cuenta lo que hacen los demás?</a:t>
             </a:r>
           </a:p>
         </p:txBody>
@@ -7736,13 +7281,13 @@
         <p:spPr>
           <a:xfrm>
             <a:off x="640000" y="1650000"/>
-            <a:ext cx="10912000" cy="1150000"/>
+            <a:ext cx="5306000" cy="4400000"/>
           </a:xfrm>
           <a:prstGeom prst="rect">
             <a:avLst/>
           </a:prstGeom>
           <a:solidFill>
-            <a:srgbClr val="EAF0F7"/>
+            <a:srgbClr val="FBE3D2"/>
           </a:solidFill>
           <a:ln>
             <a:noFill/>
@@ -7778,8 +7323,8 @@
         </p:nvSpPr>
         <p:spPr>
           <a:xfrm>
-            <a:off x="840000" y="1730000"/>
-            <a:ext cx="10512000" cy="1000000"/>
+            <a:off x="840000" y="1750000"/>
+            <a:ext cx="4906000" cy="600000"/>
           </a:xfrm>
           <a:prstGeom prst="rect">
             <a:avLst/>
@@ -7787,7 +7332,7 @@
           <a:noFill/>
         </p:spPr>
         <p:txBody>
-          <a:bodyPr wrap="square" anchor="ctr">
+          <a:bodyPr wrap="square">
             <a:spAutoFit/>
           </a:bodyPr>
           <a:lstStyle/>
@@ -7800,29 +7345,11 @@
             <a:r>
               <a:rPr sz="2800" b="1">
                 <a:solidFill>
-                  <a:srgbClr val="1F2A44"/>
-                </a:solidFill>
-                <a:latin typeface="Nunito Sans"/>
-              </a:rPr>
-              <a:t>Una razón puede ser verdad y </a:t>
-            </a:r>
-            <a:r>
-              <a:rPr sz="2800" b="1">
-                <a:solidFill>
-                  <a:srgbClr val="1F2A44"/>
-                </a:solidFill>
-                <a:latin typeface="Nunito Sans"/>
-              </a:rPr>
-              <a:t>no tener que ver</a:t>
-            </a:r>
-            <a:r>
-              <a:rPr sz="2800" b="1">
-                <a:solidFill>
-                  <a:srgbClr val="1F2A44"/>
-                </a:solidFill>
-                <a:latin typeface="Nunito Sans"/>
-              </a:rPr>
-              <a:t> con la conclusión.</a:t>
+                  <a:srgbClr val="C2531C"/>
+                </a:solidFill>
+                <a:latin typeface="Nunito Sans"/>
+              </a:rPr>
+              <a:t>No es una buena razón</a:t>
             </a:r>
           </a:p>
         </p:txBody>
@@ -7835,8 +7362,8 @@
         </p:nvSpPr>
         <p:spPr>
           <a:xfrm>
-            <a:off x="640000" y="3000000"/>
-            <a:ext cx="10912000" cy="3458000"/>
+            <a:off x="840000" y="2400000"/>
+            <a:ext cx="4906000" cy="3500000"/>
           </a:xfrm>
           <a:prstGeom prst="rect">
             <a:avLst/>
@@ -7851,12 +7378,210 @@
           <a:p>
             <a:pPr>
               <a:spcAft>
+                <a:spcPts val="1170"/>
+              </a:spcAft>
+            </a:pPr>
+            <a:r>
+              <a:rPr sz="2600" b="1">
+                <a:solidFill>
+                  <a:srgbClr val="E8793A"/>
+                </a:solidFill>
+                <a:latin typeface="Nunito Sans"/>
+              </a:rPr>
+              <a:t>• </a:t>
+            </a:r>
+            <a:r>
+              <a:rPr sz="2600" b="0">
+                <a:solidFill>
+                  <a:srgbClr val="1F2A44"/>
+                </a:solidFill>
+                <a:latin typeface="Nunito Sans"/>
+              </a:rPr>
+              <a:t>Cuando solo cuenta «me gusta» o visitas</a:t>
+            </a:r>
+          </a:p>
+          <a:p>
+            <a:pPr>
+              <a:spcAft>
+                <a:spcPts val="1170"/>
+              </a:spcAft>
+            </a:pPr>
+            <a:r>
+              <a:rPr sz="2600" b="1">
+                <a:solidFill>
+                  <a:srgbClr val="E8793A"/>
+                </a:solidFill>
+                <a:latin typeface="Nunito Sans"/>
+              </a:rPr>
+              <a:t>• </a:t>
+            </a:r>
+            <a:r>
+              <a:rPr sz="2600" b="0">
+                <a:solidFill>
+                  <a:srgbClr val="1F2A44"/>
+                </a:solidFill>
+                <a:latin typeface="Nunito Sans"/>
+              </a:rPr>
+              <a:t>Cuando todos copian sin mirar</a:t>
+            </a:r>
+          </a:p>
+          <a:p>
+            <a:pPr>
+              <a:spcAft>
+                <a:spcPts val="1170"/>
+              </a:spcAft>
+            </a:pPr>
+            <a:r>
+              <a:rPr sz="2600" b="1">
+                <a:solidFill>
+                  <a:srgbClr val="E8793A"/>
+                </a:solidFill>
+                <a:latin typeface="Nunito Sans"/>
+              </a:rPr>
+              <a:t>• </a:t>
+            </a:r>
+            <a:r>
+              <a:rPr sz="2600" b="0">
+                <a:solidFill>
+                  <a:srgbClr val="1F2A44"/>
+                </a:solidFill>
+                <a:latin typeface="Nunito Sans"/>
+              </a:rPr>
+              <a:t>Para decidir si algo está </a:t>
+            </a:r>
+            <a:r>
+              <a:rPr sz="2600" b="1">
+                <a:solidFill>
+                  <a:srgbClr val="1F2A44"/>
+                </a:solidFill>
+                <a:latin typeface="Nunito Sans"/>
+              </a:rPr>
+              <a:t>bien</a:t>
+            </a:r>
+            <a:r>
+              <a:rPr sz="2600" b="0">
+                <a:solidFill>
+                  <a:srgbClr val="1F2A44"/>
+                </a:solidFill>
+                <a:latin typeface="Nunito Sans"/>
+              </a:rPr>
+              <a:t>: muchos pueden hacer algo mal</a:t>
+            </a:r>
+          </a:p>
+        </p:txBody>
+      </p:sp>
+      <p:sp>
+        <p:nvSpPr>
+          <p:cNvPr id="7" name="Rectangle 6"/>
+          <p:cNvSpPr/>
+          <p:nvPr/>
+        </p:nvSpPr>
+        <p:spPr>
+          <a:xfrm>
+            <a:off x="6246000" y="1650000"/>
+            <a:ext cx="5306000" cy="4400000"/>
+          </a:xfrm>
+          <a:prstGeom prst="rect">
+            <a:avLst/>
+          </a:prstGeom>
+          <a:solidFill>
+            <a:srgbClr val="EAF0F7"/>
+          </a:solidFill>
+          <a:ln>
+            <a:noFill/>
+          </a:ln>
+        </p:spPr>
+        <p:style>
+          <a:lnRef idx="1">
+            <a:schemeClr val="accent1"/>
+          </a:lnRef>
+          <a:fillRef idx="3">
+            <a:schemeClr val="accent1"/>
+          </a:fillRef>
+          <a:effectRef idx="2">
+            <a:schemeClr val="accent1"/>
+          </a:effectRef>
+          <a:fontRef idx="minor">
+            <a:schemeClr val="lt1"/>
+          </a:fontRef>
+        </p:style>
+        <p:txBody>
+          <a:bodyPr rtlCol="0" anchor="ctr"/>
+          <a:lstStyle/>
+          <a:p>
+            <a:pPr algn="ctr"/>
+          </a:p>
+        </p:txBody>
+      </p:sp>
+      <p:sp>
+        <p:nvSpPr>
+          <p:cNvPr id="8" name="TextBox 7"/>
+          <p:cNvSpPr txBox="1"/>
+          <p:nvPr/>
+        </p:nvSpPr>
+        <p:spPr>
+          <a:xfrm>
+            <a:off x="6446000" y="1750000"/>
+            <a:ext cx="4906000" cy="600000"/>
+          </a:xfrm>
+          <a:prstGeom prst="rect">
+            <a:avLst/>
+          </a:prstGeom>
+          <a:noFill/>
+        </p:spPr>
+        <p:txBody>
+          <a:bodyPr wrap="square">
+            <a:spAutoFit/>
+          </a:bodyPr>
+          <a:lstStyle/>
+          <a:p>
+            <a:pPr>
+              <a:spcAft>
                 <a:spcPts val="1260"/>
               </a:spcAft>
             </a:pPr>
             <a:r>
               <a:rPr sz="2800" b="1">
                 <a:solidFill>
+                  <a:srgbClr val="2F6FB5"/>
+                </a:solidFill>
+                <a:latin typeface="Nunito Sans"/>
+              </a:rPr>
+              <a:t>Puede ser una pista</a:t>
+            </a:r>
+          </a:p>
+        </p:txBody>
+      </p:sp>
+      <p:sp>
+        <p:nvSpPr>
+          <p:cNvPr id="9" name="TextBox 8"/>
+          <p:cNvSpPr txBox="1"/>
+          <p:nvPr/>
+        </p:nvSpPr>
+        <p:spPr>
+          <a:xfrm>
+            <a:off x="6446000" y="2400000"/>
+            <a:ext cx="4906000" cy="3500000"/>
+          </a:xfrm>
+          <a:prstGeom prst="rect">
+            <a:avLst/>
+          </a:prstGeom>
+          <a:noFill/>
+        </p:spPr>
+        <p:txBody>
+          <a:bodyPr wrap="square">
+            <a:spAutoFit/>
+          </a:bodyPr>
+          <a:lstStyle/>
+          <a:p>
+            <a:pPr>
+              <a:spcAft>
+                <a:spcPts val="1170"/>
+              </a:spcAft>
+            </a:pPr>
+            <a:r>
+              <a:rPr sz="2600" b="1">
+                <a:solidFill>
                   <a:srgbClr val="E8793A"/>
                 </a:solidFill>
                 <a:latin typeface="Nunito Sans"/>
@@ -7864,23 +7589,23 @@
               <a:t>• </a:t>
             </a:r>
             <a:r>
-              <a:rPr sz="2800" b="0">
+              <a:rPr sz="2600" b="0">
                 <a:solidFill>
                   <a:srgbClr val="1F2A44"/>
                 </a:solidFill>
                 <a:latin typeface="Nunito Sans"/>
               </a:rPr>
-              <a:t>«Un chico debe ser delegado porque es el más alto»</a:t>
-            </a:r>
-          </a:p>
-          <a:p>
-            <a:pPr>
-              <a:spcAft>
-                <a:spcPts val="1260"/>
-              </a:spcAft>
-            </a:pPr>
-            <a:r>
-              <a:rPr sz="2800" b="1">
+              <a:t>Cuando muchos lo han probado y lo cuentan con detalle</a:t>
+            </a:r>
+          </a:p>
+          <a:p>
+            <a:pPr>
+              <a:spcAft>
+                <a:spcPts val="1170"/>
+              </a:spcAft>
+            </a:pPr>
+            <a:r>
+              <a:rPr sz="2600" b="1">
                 <a:solidFill>
                   <a:srgbClr val="E8793A"/>
                 </a:solidFill>
@@ -7889,13 +7614,38 @@
               <a:t>• </a:t>
             </a:r>
             <a:r>
-              <a:rPr sz="2800" b="0">
+              <a:rPr sz="2600" b="0">
                 <a:solidFill>
                   <a:srgbClr val="1F2A44"/>
                 </a:solidFill>
                 <a:latin typeface="Nunito Sans"/>
               </a:rPr>
-              <a:t>Puede ser verdad, pero la altura no importa para ser delegado</a:t>
+              <a:t>Cuando cada uno lo ha comprobado por su cuenta</a:t>
+            </a:r>
+          </a:p>
+          <a:p>
+            <a:pPr>
+              <a:spcAft>
+                <a:spcPts val="1170"/>
+              </a:spcAft>
+            </a:pPr>
+            <a:r>
+              <a:rPr sz="2600" b="1">
+                <a:solidFill>
+                  <a:srgbClr val="E8793A"/>
+                </a:solidFill>
+                <a:latin typeface="Nunito Sans"/>
+              </a:rPr>
+              <a:t>• </a:t>
+            </a:r>
+            <a:r>
+              <a:rPr sz="2600" b="0">
+                <a:solidFill>
+                  <a:srgbClr val="1F2A44"/>
+                </a:solidFill>
+                <a:latin typeface="Nunito Sans"/>
+              </a:rPr>
+              <a:t>Cuando la mayoría son expertos que miraron pruebas (el consenso, sesión 7)</a:t>
             </a:r>
           </a:p>
         </p:txBody>
@@ -7914,7 +7664,7 @@
     <p:bg>
       <p:bgPr>
         <a:solidFill>
-          <a:srgbClr val="FBF7EF"/>
+          <a:srgbClr val="1F2A44"/>
         </a:solidFill>
         <a:effectLst/>
       </p:bgPr>
@@ -7934,8 +7684,8 @@
         </p:nvSpPr>
         <p:spPr>
           <a:xfrm>
-            <a:off x="640000" y="380000"/>
-            <a:ext cx="10912000" cy="420000"/>
+            <a:off x="640000" y="2300000"/>
+            <a:ext cx="10912000" cy="500000"/>
           </a:xfrm>
           <a:prstGeom prst="rect">
             <a:avLst/>
@@ -7950,17 +7700,17 @@
           <a:p>
             <a:pPr>
               <a:spcAft>
-                <a:spcPts val="630"/>
-              </a:spcAft>
-            </a:pPr>
-            <a:r>
-              <a:rPr sz="1400" b="1">
-                <a:solidFill>
-                  <a:srgbClr val="E8793A"/>
-                </a:solidFill>
-                <a:latin typeface="Nunito Sans"/>
-              </a:rPr>
-              <a:t>BLOQUE 1 · TRES PREGUNTAS PARA UNA RAZÓN</a:t>
+                <a:spcPts val="810"/>
+              </a:spcAft>
+            </a:pPr>
+            <a:r>
+              <a:rPr sz="1800" b="1">
+                <a:solidFill>
+                  <a:srgbClr val="F4B183"/>
+                </a:solidFill>
+                <a:latin typeface="Nunito Sans"/>
+              </a:rPr>
+              <a:t>BLOQUE 2</a:t>
             </a:r>
           </a:p>
         </p:txBody>
@@ -7973,7 +7723,7 @@
         </p:nvSpPr>
         <p:spPr>
           <a:xfrm>
-            <a:off x="640000" y="760000"/>
+            <a:off x="640000" y="2800000"/>
             <a:ext cx="10912000" cy="800000"/>
           </a:xfrm>
           <a:prstGeom prst="rect">
@@ -7989,190 +7739,17 @@
           <a:p>
             <a:pPr>
               <a:spcAft>
-                <a:spcPts val="1710"/>
-              </a:spcAft>
-            </a:pPr>
-            <a:r>
-              <a:rPr sz="3800" b="1">
-                <a:solidFill>
-                  <a:srgbClr val="1F2A44"/>
+                <a:spcPts val="2160"/>
+              </a:spcAft>
+            </a:pPr>
+            <a:r>
+              <a:rPr sz="4800" b="1">
+                <a:solidFill>
+                  <a:srgbClr val="FBF7EF"/>
                 </a:solidFill>
                 <a:latin typeface="Fredoka"/>
               </a:rPr>
-              <a:t>3 · ¿Es suficiente?</a:t>
-            </a:r>
-          </a:p>
-        </p:txBody>
-      </p:sp>
-      <p:sp>
-        <p:nvSpPr>
-          <p:cNvPr id="4" name="Rectangle 3"/>
-          <p:cNvSpPr/>
-          <p:nvPr/>
-        </p:nvSpPr>
-        <p:spPr>
-          <a:xfrm>
-            <a:off x="640000" y="1650000"/>
-            <a:ext cx="10912000" cy="1150000"/>
-          </a:xfrm>
-          <a:prstGeom prst="rect">
-            <a:avLst/>
-          </a:prstGeom>
-          <a:solidFill>
-            <a:srgbClr val="EAF0F7"/>
-          </a:solidFill>
-          <a:ln>
-            <a:noFill/>
-          </a:ln>
-        </p:spPr>
-        <p:style>
-          <a:lnRef idx="1">
-            <a:schemeClr val="accent1"/>
-          </a:lnRef>
-          <a:fillRef idx="3">
-            <a:schemeClr val="accent1"/>
-          </a:fillRef>
-          <a:effectRef idx="2">
-            <a:schemeClr val="accent1"/>
-          </a:effectRef>
-          <a:fontRef idx="minor">
-            <a:schemeClr val="lt1"/>
-          </a:fontRef>
-        </p:style>
-        <p:txBody>
-          <a:bodyPr rtlCol="0" anchor="ctr"/>
-          <a:lstStyle/>
-          <a:p>
-            <a:pPr algn="ctr"/>
-          </a:p>
-        </p:txBody>
-      </p:sp>
-      <p:sp>
-        <p:nvSpPr>
-          <p:cNvPr id="5" name="TextBox 4"/>
-          <p:cNvSpPr txBox="1"/>
-          <p:nvPr/>
-        </p:nvSpPr>
-        <p:spPr>
-          <a:xfrm>
-            <a:off x="840000" y="1730000"/>
-            <a:ext cx="10512000" cy="1000000"/>
-          </a:xfrm>
-          <a:prstGeom prst="rect">
-            <a:avLst/>
-          </a:prstGeom>
-          <a:noFill/>
-        </p:spPr>
-        <p:txBody>
-          <a:bodyPr wrap="square" anchor="ctr">
-            <a:spAutoFit/>
-          </a:bodyPr>
-          <a:lstStyle/>
-          <a:p>
-            <a:pPr>
-              <a:spcAft>
-                <a:spcPts val="1260"/>
-              </a:spcAft>
-            </a:pPr>
-            <a:r>
-              <a:rPr sz="2800" b="1">
-                <a:solidFill>
-                  <a:srgbClr val="1F2A44"/>
-                </a:solidFill>
-                <a:latin typeface="Nunito Sans"/>
-              </a:rPr>
-              <a:t>Una razón puede ser verdad y venir a cuento, pero </a:t>
-            </a:r>
-            <a:r>
-              <a:rPr sz="2800" b="1">
-                <a:solidFill>
-                  <a:srgbClr val="1F2A44"/>
-                </a:solidFill>
-                <a:latin typeface="Nunito Sans"/>
-              </a:rPr>
-              <a:t>no bastar</a:t>
-            </a:r>
-            <a:r>
-              <a:rPr sz="2800" b="1">
-                <a:solidFill>
-                  <a:srgbClr val="1F2A44"/>
-                </a:solidFill>
-                <a:latin typeface="Nunito Sans"/>
-              </a:rPr>
-              <a:t>.</a:t>
-            </a:r>
-          </a:p>
-        </p:txBody>
-      </p:sp>
-      <p:sp>
-        <p:nvSpPr>
-          <p:cNvPr id="6" name="TextBox 5"/>
-          <p:cNvSpPr txBox="1"/>
-          <p:nvPr/>
-        </p:nvSpPr>
-        <p:spPr>
-          <a:xfrm>
-            <a:off x="640000" y="3000000"/>
-            <a:ext cx="10912000" cy="3458000"/>
-          </a:xfrm>
-          <a:prstGeom prst="rect">
-            <a:avLst/>
-          </a:prstGeom>
-          <a:noFill/>
-        </p:spPr>
-        <p:txBody>
-          <a:bodyPr wrap="square">
-            <a:spAutoFit/>
-          </a:bodyPr>
-          <a:lstStyle/>
-          <a:p>
-            <a:pPr>
-              <a:spcAft>
-                <a:spcPts val="1260"/>
-              </a:spcAft>
-            </a:pPr>
-            <a:r>
-              <a:rPr sz="2800" b="1">
-                <a:solidFill>
-                  <a:srgbClr val="E8793A"/>
-                </a:solidFill>
-                <a:latin typeface="Nunito Sans"/>
-              </a:rPr>
-              <a:t>• </a:t>
-            </a:r>
-            <a:r>
-              <a:rPr sz="2800" b="0">
-                <a:solidFill>
-                  <a:srgbClr val="1F2A44"/>
-                </a:solidFill>
-                <a:latin typeface="Nunito Sans"/>
-              </a:rPr>
-              <a:t>«Los de esa clase son unos vagos: uno no trajo los deberes»</a:t>
-            </a:r>
-          </a:p>
-          <a:p>
-            <a:pPr>
-              <a:spcAft>
-                <a:spcPts val="1260"/>
-              </a:spcAft>
-            </a:pPr>
-            <a:r>
-              <a:rPr sz="2800" b="1">
-                <a:solidFill>
-                  <a:srgbClr val="E8793A"/>
-                </a:solidFill>
-                <a:latin typeface="Nunito Sans"/>
-              </a:rPr>
-              <a:t>• </a:t>
-            </a:r>
-            <a:r>
-              <a:rPr sz="2800" b="0">
-                <a:solidFill>
-                  <a:srgbClr val="1F2A44"/>
-                </a:solidFill>
-                <a:latin typeface="Nunito Sans"/>
-              </a:rPr>
-              <a:t>Un alumno, un día: no basta para hablar de toda una clase</a:t>
+              <a:t>Casos resueltos</a:t>
             </a:r>
           </a:p>
         </p:txBody>
